--- a/История/Дмитрий Донской.pptx
+++ b/История/Дмитрий Донской.pptx
@@ -12,6 +12,8 @@
     <p:sldId id="260" r:id="rId7"/>
     <p:sldId id="261" r:id="rId8"/>
     <p:sldId id="262" r:id="rId9"/>
+    <p:sldId id="263" r:id="rId10"/>
+    <p:sldId id="264" r:id="rId11"/>
   </p:sldIdLst>
   <p:sldSz cx="10080625" cy="5670550"/>
   <p:notesSz cx="7559675" cy="10691813"/>
@@ -21,6 +23,556 @@
 <file path=ppt/slideLayouts/slideLayout1.xml><?xml version="1.0" encoding="utf-8"?>
 <p:sldLayout xmlns:a="http://schemas.openxmlformats.org/drawingml/2006/main" xmlns:p="http://schemas.openxmlformats.org/presentationml/2006/main" xmlns:r="http://schemas.openxmlformats.org/officeDocument/2006/relationships" xmlns:p14="http://schemas.microsoft.com/office/powerpoint/2010/main" xmlns:p15="http://schemas.microsoft.com/office/powerpoint/2012/main" xmlns:mc="http://schemas.openxmlformats.org/markup-compatibility/2006" type="title" preserve="1">
   <p:cSld name="Обычный">
+    <p:spTree>
+      <p:nvGrpSpPr>
+        <p:cNvPr id="1" name=""/>
+        <p:cNvGrpSpPr/>
+        <p:nvPr/>
+      </p:nvGrpSpPr>
+      <p:grpSpPr>
+        <a:xfrm>
+          <a:off x="0" y="0"/>
+          <a:ext cx="0" cy="0"/>
+          <a:chOff x="0" y="0"/>
+          <a:chExt cx="0" cy="0"/>
+        </a:xfrm>
+      </p:grpSpPr>
+      <p:sp>
+        <p:nvSpPr>
+          <p:cNvPr id="2" name="PlaceHolder 1"/>
+          <p:cNvSpPr>
+            <a:spLocks noGrp="1"/>
+          </p:cNvSpPr>
+          <p:nvPr>
+            <p:ph type="title"/>
+          </p:nvPr>
+        </p:nvSpPr>
+        <p:spPr>
+          <a:xfrm>
+            <a:off x="504000" y="561600"/>
+            <a:ext cx="9071280" cy="274680"/>
+          </a:xfrm>
+          <a:prstGeom prst="rect">
+            <a:avLst/>
+          </a:prstGeom>
+          <a:noFill/>
+          <a:ln w="0">
+            <a:noFill/>
+          </a:ln>
+        </p:spPr>
+        <p:txBody>
+          <a:bodyPr lIns="0" rIns="0" tIns="0" bIns="0" anchor="ctr">
+            <a:spAutoFit/>
+          </a:bodyPr>
+          <a:p>
+            <a:pPr indent="0">
+              <a:buNone/>
+            </a:pPr>
+            <a:r>
+              <a:rPr b="0" lang="ru-RU" sz="1800" strike="noStrike" u="none">
+                <a:solidFill>
+                  <a:srgbClr val="000000"/>
+                </a:solidFill>
+                <a:effectLst/>
+                <a:uFillTx/>
+                <a:latin typeface="Arial"/>
+              </a:rPr>
+              <a:t>Для правки текста заглавия щёлкните мышью</a:t>
+            </a:r>
+            <a:endParaRPr b="0" lang="ru-RU" sz="1800" strike="noStrike" u="none">
+              <a:solidFill>
+                <a:srgbClr val="000000"/>
+              </a:solidFill>
+              <a:effectLst/>
+              <a:uFillTx/>
+              <a:latin typeface="Arial"/>
+            </a:endParaRPr>
+          </a:p>
+        </p:txBody>
+      </p:sp>
+      <p:sp>
+        <p:nvSpPr>
+          <p:cNvPr id="3" name="PlaceHolder 2"/>
+          <p:cNvSpPr>
+            <a:spLocks noGrp="1"/>
+          </p:cNvSpPr>
+          <p:nvPr>
+            <p:ph type="ftr" idx="1"/>
+          </p:nvPr>
+        </p:nvSpPr>
+        <p:spPr>
+          <a:xfrm>
+            <a:off x="3447360" y="5165280"/>
+            <a:ext cx="3194640" cy="390240"/>
+          </a:xfrm>
+          <a:prstGeom prst="rect">
+            <a:avLst/>
+          </a:prstGeom>
+          <a:noFill/>
+          <a:ln w="0">
+            <a:noFill/>
+          </a:ln>
+        </p:spPr>
+        <p:txBody>
+          <a:bodyPr lIns="0" rIns="0" tIns="0" bIns="0" anchor="t">
+            <a:noAutofit/>
+          </a:bodyPr>
+          <a:lstStyle>
+            <a:lvl1pPr indent="0" algn="ctr">
+              <a:lnSpc>
+                <a:spcPct val="100000"/>
+              </a:lnSpc>
+              <a:buNone/>
+              <a:tabLst>
+                <a:tab algn="l" pos="0"/>
+              </a:tabLst>
+              <a:defRPr b="0" lang="ru-RU" sz="1400" strike="noStrike" u="none">
+                <a:solidFill>
+                  <a:srgbClr val="000000"/>
+                </a:solidFill>
+                <a:effectLst/>
+                <a:uFillTx/>
+                <a:latin typeface="Times New Roman"/>
+              </a:defRPr>
+            </a:lvl1pPr>
+          </a:lstStyle>
+          <a:p>
+            <a:pPr indent="0" algn="ctr">
+              <a:lnSpc>
+                <a:spcPct val="100000"/>
+              </a:lnSpc>
+              <a:buNone/>
+              <a:tabLst>
+                <a:tab algn="l" pos="0"/>
+              </a:tabLst>
+            </a:pPr>
+            <a:r>
+              <a:rPr b="0" lang="ru-RU" sz="1400" strike="noStrike" u="none">
+                <a:solidFill>
+                  <a:srgbClr val="000000"/>
+                </a:solidFill>
+                <a:effectLst/>
+                <a:uFillTx/>
+                <a:latin typeface="Times New Roman"/>
+              </a:rPr>
+              <a:t> </a:t>
+            </a:r>
+            <a:endParaRPr b="0" lang="ru-RU" sz="1400" strike="noStrike" u="none">
+              <a:solidFill>
+                <a:srgbClr val="000000"/>
+              </a:solidFill>
+              <a:effectLst/>
+              <a:uFillTx/>
+              <a:latin typeface="Times New Roman"/>
+            </a:endParaRPr>
+          </a:p>
+        </p:txBody>
+      </p:sp>
+      <p:sp>
+        <p:nvSpPr>
+          <p:cNvPr id="4" name="PlaceHolder 3"/>
+          <p:cNvSpPr>
+            <a:spLocks noGrp="1"/>
+          </p:cNvSpPr>
+          <p:nvPr>
+            <p:ph type="sldNum" idx="2"/>
+          </p:nvPr>
+        </p:nvSpPr>
+        <p:spPr>
+          <a:xfrm>
+            <a:off x="7227360" y="5165280"/>
+            <a:ext cx="2347920" cy="390240"/>
+          </a:xfrm>
+          <a:prstGeom prst="rect">
+            <a:avLst/>
+          </a:prstGeom>
+          <a:noFill/>
+          <a:ln w="0">
+            <a:noFill/>
+          </a:ln>
+        </p:spPr>
+        <p:txBody>
+          <a:bodyPr lIns="0" rIns="0" tIns="0" bIns="0" anchor="t">
+            <a:noAutofit/>
+          </a:bodyPr>
+          <a:lstStyle>
+            <a:lvl1pPr indent="0" algn="r">
+              <a:lnSpc>
+                <a:spcPct val="100000"/>
+              </a:lnSpc>
+              <a:buNone/>
+              <a:tabLst>
+                <a:tab algn="l" pos="0"/>
+              </a:tabLst>
+              <a:defRPr b="0" lang="ru-RU" sz="1400" strike="noStrike" u="none">
+                <a:solidFill>
+                  <a:srgbClr val="000000"/>
+                </a:solidFill>
+                <a:effectLst/>
+                <a:uFillTx/>
+                <a:latin typeface="Times New Roman"/>
+              </a:defRPr>
+            </a:lvl1pPr>
+          </a:lstStyle>
+          <a:p>
+            <a:pPr indent="0" algn="r">
+              <a:lnSpc>
+                <a:spcPct val="100000"/>
+              </a:lnSpc>
+              <a:buNone/>
+              <a:tabLst>
+                <a:tab algn="l" pos="0"/>
+              </a:tabLst>
+            </a:pPr>
+            <a:fld id="{C90037CB-B0B2-46DF-B2B0-559E5CF3C9E1}" type="slidenum">
+              <a:rPr b="0" lang="ru-RU" sz="1400" strike="noStrike" u="none">
+                <a:solidFill>
+                  <a:srgbClr val="000000"/>
+                </a:solidFill>
+                <a:effectLst/>
+                <a:uFillTx/>
+                <a:latin typeface="Times New Roman"/>
+              </a:rPr>
+              <a:t>2</a:t>
+            </a:fld>
+            <a:endParaRPr b="0" lang="ru-RU" sz="1400" strike="noStrike" u="none">
+              <a:solidFill>
+                <a:srgbClr val="000000"/>
+              </a:solidFill>
+              <a:effectLst/>
+              <a:uFillTx/>
+              <a:latin typeface="Times New Roman"/>
+            </a:endParaRPr>
+          </a:p>
+        </p:txBody>
+      </p:sp>
+      <p:sp>
+        <p:nvSpPr>
+          <p:cNvPr id="5" name="PlaceHolder 4"/>
+          <p:cNvSpPr>
+            <a:spLocks noGrp="1"/>
+          </p:cNvSpPr>
+          <p:nvPr>
+            <p:ph type="dt" idx="3"/>
+          </p:nvPr>
+        </p:nvSpPr>
+        <p:spPr>
+          <a:xfrm>
+            <a:off x="504000" y="5165280"/>
+            <a:ext cx="2347920" cy="390240"/>
+          </a:xfrm>
+          <a:prstGeom prst="rect">
+            <a:avLst/>
+          </a:prstGeom>
+          <a:noFill/>
+          <a:ln w="0">
+            <a:noFill/>
+          </a:ln>
+        </p:spPr>
+        <p:txBody>
+          <a:bodyPr lIns="0" rIns="0" tIns="0" bIns="0" anchor="t">
+            <a:noAutofit/>
+          </a:bodyPr>
+          <a:lstStyle>
+            <a:lvl1pPr indent="0">
+              <a:buNone/>
+              <a:defRPr b="0" lang="ru-RU" sz="1400" strike="noStrike" u="none">
+                <a:solidFill>
+                  <a:srgbClr val="000000"/>
+                </a:solidFill>
+                <a:effectLst/>
+                <a:uFillTx/>
+                <a:latin typeface="Times New Roman"/>
+              </a:defRPr>
+            </a:lvl1pPr>
+          </a:lstStyle>
+          <a:p>
+            <a:pPr indent="0">
+              <a:buNone/>
+            </a:pPr>
+            <a:r>
+              <a:rPr b="0" lang="ru-RU" sz="1400" strike="noStrike" u="none">
+                <a:solidFill>
+                  <a:srgbClr val="000000"/>
+                </a:solidFill>
+                <a:effectLst/>
+                <a:uFillTx/>
+                <a:latin typeface="Times New Roman"/>
+              </a:rPr>
+              <a:t> </a:t>
+            </a:r>
+            <a:endParaRPr b="0" lang="ru-RU" sz="1400" strike="noStrike" u="none">
+              <a:solidFill>
+                <a:srgbClr val="000000"/>
+              </a:solidFill>
+              <a:effectLst/>
+              <a:uFillTx/>
+              <a:latin typeface="Times New Roman"/>
+            </a:endParaRPr>
+          </a:p>
+        </p:txBody>
+      </p:sp>
+      <p:sp>
+        <p:nvSpPr>
+          <p:cNvPr id="6" name="PlaceHolder 5"/>
+          <p:cNvSpPr>
+            <a:spLocks noGrp="1"/>
+          </p:cNvSpPr>
+          <p:nvPr>
+            <p:ph type="body"/>
+          </p:nvPr>
+        </p:nvSpPr>
+        <p:spPr>
+          <a:xfrm>
+            <a:off x="504000" y="1326600"/>
+            <a:ext cx="9072000" cy="3288600"/>
+          </a:xfrm>
+          <a:prstGeom prst="rect">
+            <a:avLst/>
+          </a:prstGeom>
+          <a:noFill/>
+          <a:ln w="0">
+            <a:noFill/>
+          </a:ln>
+        </p:spPr>
+        <p:txBody>
+          <a:bodyPr lIns="0" rIns="0" tIns="0" bIns="0" anchor="t">
+            <a:normAutofit/>
+          </a:bodyPr>
+          <a:p>
+            <a:pPr marL="432000" indent="-324000">
+              <a:spcBef>
+                <a:spcPts val="1417"/>
+              </a:spcBef>
+              <a:buClr>
+                <a:srgbClr val="000000"/>
+              </a:buClr>
+              <a:buSzPct val="45000"/>
+              <a:buFont typeface="Wingdings" charset="2"/>
+              <a:buChar char=""/>
+            </a:pPr>
+            <a:r>
+              <a:rPr b="0" lang="ru-RU" sz="3200" strike="noStrike" u="none">
+                <a:solidFill>
+                  <a:srgbClr val="000000"/>
+                </a:solidFill>
+                <a:effectLst/>
+                <a:uFillTx/>
+                <a:latin typeface="Arial"/>
+              </a:rPr>
+              <a:t>Для правки структуры щёлкните мышью</a:t>
+            </a:r>
+            <a:endParaRPr b="0" lang="ru-RU" sz="3200" strike="noStrike" u="none">
+              <a:solidFill>
+                <a:srgbClr val="000000"/>
+              </a:solidFill>
+              <a:effectLst/>
+              <a:uFillTx/>
+              <a:latin typeface="Arial"/>
+            </a:endParaRPr>
+          </a:p>
+          <a:p>
+            <a:pPr lvl="1" marL="864000" indent="-324000">
+              <a:spcBef>
+                <a:spcPts val="1134"/>
+              </a:spcBef>
+              <a:buClr>
+                <a:srgbClr val="000000"/>
+              </a:buClr>
+              <a:buSzPct val="75000"/>
+              <a:buFont typeface="Symbol" charset="2"/>
+              <a:buChar char=""/>
+            </a:pPr>
+            <a:r>
+              <a:rPr b="0" lang="ru-RU" sz="2800" strike="noStrike" u="none">
+                <a:solidFill>
+                  <a:srgbClr val="000000"/>
+                </a:solidFill>
+                <a:effectLst/>
+                <a:uFillTx/>
+                <a:latin typeface="Arial"/>
+              </a:rPr>
+              <a:t>Второй уровень структуры</a:t>
+            </a:r>
+            <a:endParaRPr b="0" lang="ru-RU" sz="2800" strike="noStrike" u="none">
+              <a:solidFill>
+                <a:srgbClr val="000000"/>
+              </a:solidFill>
+              <a:effectLst/>
+              <a:uFillTx/>
+              <a:latin typeface="Arial"/>
+            </a:endParaRPr>
+          </a:p>
+          <a:p>
+            <a:pPr lvl="2" marL="1296000" indent="-288000">
+              <a:spcBef>
+                <a:spcPts val="850"/>
+              </a:spcBef>
+              <a:buClr>
+                <a:srgbClr val="000000"/>
+              </a:buClr>
+              <a:buSzPct val="45000"/>
+              <a:buFont typeface="Wingdings" charset="2"/>
+              <a:buChar char=""/>
+            </a:pPr>
+            <a:r>
+              <a:rPr b="0" lang="ru-RU" sz="2400" strike="noStrike" u="none">
+                <a:solidFill>
+                  <a:srgbClr val="000000"/>
+                </a:solidFill>
+                <a:effectLst/>
+                <a:uFillTx/>
+                <a:latin typeface="Arial"/>
+              </a:rPr>
+              <a:t>Третий уровень структуры</a:t>
+            </a:r>
+            <a:endParaRPr b="0" lang="ru-RU" sz="2400" strike="noStrike" u="none">
+              <a:solidFill>
+                <a:srgbClr val="000000"/>
+              </a:solidFill>
+              <a:effectLst/>
+              <a:uFillTx/>
+              <a:latin typeface="Arial"/>
+            </a:endParaRPr>
+          </a:p>
+          <a:p>
+            <a:pPr lvl="3" marL="1728000" indent="-216000">
+              <a:spcBef>
+                <a:spcPts val="567"/>
+              </a:spcBef>
+              <a:buClr>
+                <a:srgbClr val="000000"/>
+              </a:buClr>
+              <a:buSzPct val="75000"/>
+              <a:buFont typeface="Symbol" charset="2"/>
+              <a:buChar char=""/>
+            </a:pPr>
+            <a:r>
+              <a:rPr b="0" lang="ru-RU" sz="2000" strike="noStrike" u="none">
+                <a:solidFill>
+                  <a:srgbClr val="000000"/>
+                </a:solidFill>
+                <a:effectLst/>
+                <a:uFillTx/>
+                <a:latin typeface="Arial"/>
+              </a:rPr>
+              <a:t>Четвёртый уровень структуры</a:t>
+            </a:r>
+            <a:endParaRPr b="0" lang="ru-RU" sz="2000" strike="noStrike" u="none">
+              <a:solidFill>
+                <a:srgbClr val="000000"/>
+              </a:solidFill>
+              <a:effectLst/>
+              <a:uFillTx/>
+              <a:latin typeface="Arial"/>
+            </a:endParaRPr>
+          </a:p>
+          <a:p>
+            <a:pPr lvl="4" marL="2160000" indent="-216000">
+              <a:spcBef>
+                <a:spcPts val="283"/>
+              </a:spcBef>
+              <a:buClr>
+                <a:srgbClr val="000000"/>
+              </a:buClr>
+              <a:buSzPct val="45000"/>
+              <a:buFont typeface="Wingdings" charset="2"/>
+              <a:buChar char=""/>
+            </a:pPr>
+            <a:r>
+              <a:rPr b="0" lang="ru-RU" sz="2000" strike="noStrike" u="none">
+                <a:solidFill>
+                  <a:srgbClr val="000000"/>
+                </a:solidFill>
+                <a:effectLst/>
+                <a:uFillTx/>
+                <a:latin typeface="Arial"/>
+              </a:rPr>
+              <a:t>Пятый уровень структуры</a:t>
+            </a:r>
+            <a:endParaRPr b="0" lang="ru-RU" sz="2000" strike="noStrike" u="none">
+              <a:solidFill>
+                <a:srgbClr val="000000"/>
+              </a:solidFill>
+              <a:effectLst/>
+              <a:uFillTx/>
+              <a:latin typeface="Arial"/>
+            </a:endParaRPr>
+          </a:p>
+          <a:p>
+            <a:pPr lvl="5" marL="2592000" indent="-216000">
+              <a:spcBef>
+                <a:spcPts val="283"/>
+              </a:spcBef>
+              <a:buClr>
+                <a:srgbClr val="000000"/>
+              </a:buClr>
+              <a:buSzPct val="45000"/>
+              <a:buFont typeface="Wingdings" charset="2"/>
+              <a:buChar char=""/>
+            </a:pPr>
+            <a:r>
+              <a:rPr b="0" lang="ru-RU" sz="2000" strike="noStrike" u="none">
+                <a:solidFill>
+                  <a:srgbClr val="000000"/>
+                </a:solidFill>
+                <a:effectLst/>
+                <a:uFillTx/>
+                <a:latin typeface="Arial"/>
+              </a:rPr>
+              <a:t>Шестой уровень структуры</a:t>
+            </a:r>
+            <a:endParaRPr b="0" lang="ru-RU" sz="2000" strike="noStrike" u="none">
+              <a:solidFill>
+                <a:srgbClr val="000000"/>
+              </a:solidFill>
+              <a:effectLst/>
+              <a:uFillTx/>
+              <a:latin typeface="Arial"/>
+            </a:endParaRPr>
+          </a:p>
+          <a:p>
+            <a:pPr lvl="6" marL="3024000" indent="-216000">
+              <a:spcBef>
+                <a:spcPts val="283"/>
+              </a:spcBef>
+              <a:buClr>
+                <a:srgbClr val="000000"/>
+              </a:buClr>
+              <a:buSzPct val="45000"/>
+              <a:buFont typeface="Wingdings" charset="2"/>
+              <a:buChar char=""/>
+            </a:pPr>
+            <a:r>
+              <a:rPr b="0" lang="ru-RU" sz="2000" strike="noStrike" u="none">
+                <a:solidFill>
+                  <a:srgbClr val="000000"/>
+                </a:solidFill>
+                <a:effectLst/>
+                <a:uFillTx/>
+                <a:latin typeface="Arial"/>
+              </a:rPr>
+              <a:t>Седьмой уровень структуры</a:t>
+            </a:r>
+            <a:endParaRPr b="0" lang="ru-RU" sz="2000" strike="noStrike" u="none">
+              <a:solidFill>
+                <a:srgbClr val="000000"/>
+              </a:solidFill>
+              <a:effectLst/>
+              <a:uFillTx/>
+              <a:latin typeface="Arial"/>
+            </a:endParaRPr>
+          </a:p>
+        </p:txBody>
+      </p:sp>
+    </p:spTree>
+  </p:cSld>
+</p:sldLayout>
+</file>
+
+<file path=ppt/slideLayouts/slideLayout2.xml><?xml version="1.0" encoding="utf-8"?>
+<p:sldLayout xmlns:a="http://schemas.openxmlformats.org/drawingml/2006/main" xmlns:p="http://schemas.openxmlformats.org/presentationml/2006/main" xmlns:r="http://schemas.openxmlformats.org/officeDocument/2006/relationships" xmlns:p14="http://schemas.microsoft.com/office/powerpoint/2010/main" xmlns:p15="http://schemas.microsoft.com/office/powerpoint/2012/main" xmlns:mc="http://schemas.openxmlformats.org/markup-compatibility/2006" type="tx" preserve="1">
+  <p:cSld name="Обычный 1">
     <p:spTree>
       <p:nvGrpSpPr>
         <p:cNvPr id="1" name=""/>
@@ -47,8 +599,8 @@
         </p:nvSpPr>
         <p:spPr>
           <a:xfrm>
-            <a:off x="504000" y="74160"/>
-            <a:ext cx="9071640" cy="1250280"/>
+            <a:off x="504000" y="561600"/>
+            <a:ext cx="9071280" cy="274680"/>
           </a:xfrm>
           <a:prstGeom prst="rect">
             <a:avLst/>
@@ -63,10 +615,21 @@
             <a:spAutoFit/>
           </a:bodyPr>
           <a:p>
-            <a:pPr indent="0" algn="ctr">
+            <a:pPr indent="0">
               <a:buNone/>
             </a:pPr>
-            <a:endParaRPr b="0" lang="ru-RU" sz="4400" strike="noStrike" u="none">
+            <a:r>
+              <a:rPr b="0" lang="ru-RU" sz="1800" strike="noStrike" u="none">
+                <a:solidFill>
+                  <a:srgbClr val="000000"/>
+                </a:solidFill>
+                <a:effectLst/>
+                <a:uFillTx/>
+                <a:latin typeface="Arial"/>
+              </a:rPr>
+              <a:t>Для правки текста заглавия щёлкните мышью</a:t>
+            </a:r>
+            <a:endParaRPr b="0" lang="ru-RU" sz="1800" strike="noStrike" u="none">
               <a:solidFill>
                 <a:srgbClr val="000000"/>
               </a:solidFill>
@@ -84,180 +647,13 @@
             <a:spLocks noGrp="1"/>
           </p:cNvSpPr>
           <p:nvPr>
-            <p:ph type="subTitle"/>
+            <p:ph type="body"/>
           </p:nvPr>
         </p:nvSpPr>
         <p:spPr>
           <a:xfrm>
             <a:off x="504000" y="1326600"/>
-            <a:ext cx="9071640" cy="3288240"/>
-          </a:xfrm>
-          <a:prstGeom prst="rect">
-            <a:avLst/>
-          </a:prstGeom>
-          <a:noFill/>
-          <a:ln w="0">
-            <a:noFill/>
-          </a:ln>
-        </p:spPr>
-        <p:txBody>
-          <a:bodyPr lIns="0" rIns="0" tIns="0" bIns="0" anchor="ctr">
-            <a:spAutoFit/>
-          </a:bodyPr>
-          <a:p>
-            <a:pPr indent="0" algn="ctr">
-              <a:buNone/>
-            </a:pPr>
-            <a:endParaRPr b="0" lang="ru-RU" sz="3200" strike="noStrike" u="none">
-              <a:solidFill>
-                <a:srgbClr val="000000"/>
-              </a:solidFill>
-              <a:effectLst/>
-              <a:uFillTx/>
-              <a:latin typeface="Arial"/>
-            </a:endParaRPr>
-          </a:p>
-        </p:txBody>
-      </p:sp>
-      <p:sp>
-        <p:nvSpPr>
-          <p:cNvPr id="4" name="PlaceHolder 3"/>
-          <p:cNvSpPr>
-            <a:spLocks noGrp="1"/>
-          </p:cNvSpPr>
-          <p:nvPr>
-            <p:ph type="ftr" idx="2"/>
-          </p:nvPr>
-        </p:nvSpPr>
-        <p:spPr/>
-        <p:txBody>
-          <a:bodyPr/>
-          <a:p>
-            <a:r>
-              <a:t>Footer</a:t>
-            </a:r>
-          </a:p>
-        </p:txBody>
-      </p:sp>
-      <p:sp>
-        <p:nvSpPr>
-          <p:cNvPr id="5" name="PlaceHolder 4"/>
-          <p:cNvSpPr>
-            <a:spLocks noGrp="1"/>
-          </p:cNvSpPr>
-          <p:nvPr>
-            <p:ph type="sldNum" idx="3"/>
-          </p:nvPr>
-        </p:nvSpPr>
-        <p:spPr/>
-        <p:txBody>
-          <a:bodyPr/>
-          <a:p>
-            <a:fld id="{91937614-6AC5-49B0-B68F-02156C86F73A}" type="slidenum">
-              <a:t>&lt;#&gt;</a:t>
-            </a:fld>
-          </a:p>
-        </p:txBody>
-      </p:sp>
-      <p:sp>
-        <p:nvSpPr>
-          <p:cNvPr id="6" name="PlaceHolder 5"/>
-          <p:cNvSpPr>
-            <a:spLocks noGrp="1"/>
-          </p:cNvSpPr>
-          <p:nvPr>
-            <p:ph type="dt" idx="1"/>
-          </p:nvPr>
-        </p:nvSpPr>
-        <p:spPr/>
-        <p:txBody>
-          <a:bodyPr/>
-          <a:p>
-            <a:r>
-              <a:rPr lang="ru-RU"/>
-              <a:t/>
-            </a:r>
-          </a:p>
-        </p:txBody>
-      </p:sp>
-    </p:spTree>
-  </p:cSld>
-</p:sldLayout>
-</file>
-
-<file path=ppt/slideLayouts/slideLayout2.xml><?xml version="1.0" encoding="utf-8"?>
-<p:sldLayout xmlns:a="http://schemas.openxmlformats.org/drawingml/2006/main" xmlns:p="http://schemas.openxmlformats.org/presentationml/2006/main" xmlns:r="http://schemas.openxmlformats.org/officeDocument/2006/relationships" xmlns:p14="http://schemas.microsoft.com/office/powerpoint/2010/main" xmlns:p15="http://schemas.microsoft.com/office/powerpoint/2012/main" xmlns:mc="http://schemas.openxmlformats.org/markup-compatibility/2006" type="tx" preserve="1">
-  <p:cSld name="Обычный">
-    <p:spTree>
-      <p:nvGrpSpPr>
-        <p:cNvPr id="1" name=""/>
-        <p:cNvGrpSpPr/>
-        <p:nvPr/>
-      </p:nvGrpSpPr>
-      <p:grpSpPr>
-        <a:xfrm>
-          <a:off x="0" y="0"/>
-          <a:ext cx="0" cy="0"/>
-          <a:chOff x="0" y="0"/>
-          <a:chExt cx="0" cy="0"/>
-        </a:xfrm>
-      </p:grpSpPr>
-      <p:sp>
-        <p:nvSpPr>
-          <p:cNvPr id="9" name="PlaceHolder 1"/>
-          <p:cNvSpPr>
-            <a:spLocks noGrp="1"/>
-          </p:cNvSpPr>
-          <p:nvPr>
-            <p:ph type="title"/>
-          </p:nvPr>
-        </p:nvSpPr>
-        <p:spPr>
-          <a:xfrm>
-            <a:off x="504000" y="74160"/>
-            <a:ext cx="9071640" cy="1250280"/>
-          </a:xfrm>
-          <a:prstGeom prst="rect">
-            <a:avLst/>
-          </a:prstGeom>
-          <a:noFill/>
-          <a:ln w="0">
-            <a:noFill/>
-          </a:ln>
-        </p:spPr>
-        <p:txBody>
-          <a:bodyPr lIns="0" rIns="0" tIns="0" bIns="0" anchor="ctr">
-            <a:spAutoFit/>
-          </a:bodyPr>
-          <a:p>
-            <a:pPr indent="0" algn="ctr">
-              <a:buNone/>
-            </a:pPr>
-            <a:endParaRPr b="0" lang="ru-RU" sz="4400" strike="noStrike" u="none">
-              <a:solidFill>
-                <a:srgbClr val="000000"/>
-              </a:solidFill>
-              <a:effectLst/>
-              <a:uFillTx/>
-              <a:latin typeface="Arial"/>
-            </a:endParaRPr>
-          </a:p>
-        </p:txBody>
-      </p:sp>
-      <p:sp>
-        <p:nvSpPr>
-          <p:cNvPr id="10" name="PlaceHolder 2"/>
-          <p:cNvSpPr>
-            <a:spLocks noGrp="1"/>
-          </p:cNvSpPr>
-          <p:nvPr>
-            <p:ph/>
-          </p:nvPr>
-        </p:nvSpPr>
-        <p:spPr>
-          <a:xfrm>
-            <a:off x="504000" y="1326600"/>
-            <a:ext cx="9071640" cy="3288240"/>
+            <a:ext cx="9071280" cy="3287880"/>
           </a:xfrm>
           <a:prstGeom prst="rect">
             <a:avLst/>
@@ -272,13 +668,221 @@
             <a:normAutofit/>
           </a:bodyPr>
           <a:p>
-            <a:pPr indent="0">
+            <a:pPr marL="432000" indent="-324000">
               <a:spcBef>
                 <a:spcPts val="1417"/>
               </a:spcBef>
-              <a:buNone/>
-            </a:pPr>
-            <a:endParaRPr b="0" lang="ru-RU" sz="3200" strike="noStrike" u="none">
+              <a:buClr>
+                <a:srgbClr val="000000"/>
+              </a:buClr>
+              <a:buSzPct val="45000"/>
+              <a:buFont typeface="Wingdings" charset="2"/>
+              <a:buChar char=""/>
+            </a:pPr>
+            <a:r>
+              <a:rPr b="0" lang="ru-RU" sz="1800" strike="noStrike" u="none">
+                <a:solidFill>
+                  <a:srgbClr val="000000"/>
+                </a:solidFill>
+                <a:effectLst/>
+                <a:uFillTx/>
+                <a:latin typeface="Arial"/>
+              </a:rPr>
+              <a:t>Для правки структуры щёлкните мышью</a:t>
+            </a:r>
+            <a:endParaRPr b="0" lang="ru-RU" sz="1800" strike="noStrike" u="none">
+              <a:solidFill>
+                <a:srgbClr val="000000"/>
+              </a:solidFill>
+              <a:effectLst/>
+              <a:uFillTx/>
+              <a:latin typeface="Arial"/>
+            </a:endParaRPr>
+          </a:p>
+          <a:p>
+            <a:pPr lvl="1" marL="864000" indent="-324000">
+              <a:spcBef>
+                <a:spcPts val="1134"/>
+              </a:spcBef>
+              <a:buClr>
+                <a:srgbClr val="000000"/>
+              </a:buClr>
+              <a:buSzPct val="75000"/>
+              <a:buFont typeface="Symbol" charset="2"/>
+              <a:buChar char=""/>
+            </a:pPr>
+            <a:r>
+              <a:rPr b="0" lang="ru-RU" sz="1800" strike="noStrike" u="none">
+                <a:solidFill>
+                  <a:srgbClr val="000000"/>
+                </a:solidFill>
+                <a:effectLst/>
+                <a:uFillTx/>
+                <a:latin typeface="Arial"/>
+              </a:rPr>
+              <a:t>Второй уровень структуры</a:t>
+            </a:r>
+            <a:endParaRPr b="0" lang="ru-RU" sz="1800" strike="noStrike" u="none">
+              <a:solidFill>
+                <a:srgbClr val="000000"/>
+              </a:solidFill>
+              <a:effectLst/>
+              <a:uFillTx/>
+              <a:latin typeface="Arial"/>
+            </a:endParaRPr>
+          </a:p>
+          <a:p>
+            <a:pPr lvl="2" marL="1296000" indent="-288000">
+              <a:spcBef>
+                <a:spcPts val="850"/>
+              </a:spcBef>
+              <a:buClr>
+                <a:srgbClr val="000000"/>
+              </a:buClr>
+              <a:buSzPct val="45000"/>
+              <a:buFont typeface="Wingdings" charset="2"/>
+              <a:buChar char=""/>
+            </a:pPr>
+            <a:r>
+              <a:rPr b="0" lang="ru-RU" sz="1800" strike="noStrike" u="none">
+                <a:solidFill>
+                  <a:srgbClr val="000000"/>
+                </a:solidFill>
+                <a:effectLst/>
+                <a:uFillTx/>
+                <a:latin typeface="Arial"/>
+              </a:rPr>
+              <a:t>Третий уровень структуры</a:t>
+            </a:r>
+            <a:endParaRPr b="0" lang="ru-RU" sz="1800" strike="noStrike" u="none">
+              <a:solidFill>
+                <a:srgbClr val="000000"/>
+              </a:solidFill>
+              <a:effectLst/>
+              <a:uFillTx/>
+              <a:latin typeface="Arial"/>
+            </a:endParaRPr>
+          </a:p>
+          <a:p>
+            <a:pPr lvl="3" marL="1728000" indent="-216000">
+              <a:spcBef>
+                <a:spcPts val="567"/>
+              </a:spcBef>
+              <a:buClr>
+                <a:srgbClr val="000000"/>
+              </a:buClr>
+              <a:buSzPct val="75000"/>
+              <a:buFont typeface="Symbol" charset="2"/>
+              <a:buChar char=""/>
+            </a:pPr>
+            <a:r>
+              <a:rPr b="0" lang="ru-RU" sz="1800" strike="noStrike" u="none">
+                <a:solidFill>
+                  <a:srgbClr val="000000"/>
+                </a:solidFill>
+                <a:effectLst/>
+                <a:uFillTx/>
+                <a:latin typeface="Arial"/>
+              </a:rPr>
+              <a:t>Четвёртый уровень структуры</a:t>
+            </a:r>
+            <a:endParaRPr b="0" lang="ru-RU" sz="1800" strike="noStrike" u="none">
+              <a:solidFill>
+                <a:srgbClr val="000000"/>
+              </a:solidFill>
+              <a:effectLst/>
+              <a:uFillTx/>
+              <a:latin typeface="Arial"/>
+            </a:endParaRPr>
+          </a:p>
+          <a:p>
+            <a:pPr lvl="4" marL="2160000" indent="-216000">
+              <a:spcBef>
+                <a:spcPts val="283"/>
+              </a:spcBef>
+              <a:buClr>
+                <a:srgbClr val="000000"/>
+              </a:buClr>
+              <a:buSzPct val="45000"/>
+              <a:buFont typeface="Wingdings" charset="2"/>
+              <a:buChar char=""/>
+            </a:pPr>
+            <a:r>
+              <a:rPr b="0" lang="ru-RU" sz="1800" strike="noStrike" u="none">
+                <a:solidFill>
+                  <a:srgbClr val="000000"/>
+                </a:solidFill>
+                <a:effectLst/>
+                <a:uFillTx/>
+                <a:latin typeface="Arial"/>
+              </a:rPr>
+              <a:t>Пятый уровень структуры</a:t>
+            </a:r>
+            <a:endParaRPr b="0" lang="ru-RU" sz="1800" strike="noStrike" u="none">
+              <a:solidFill>
+                <a:srgbClr val="000000"/>
+              </a:solidFill>
+              <a:effectLst/>
+              <a:uFillTx/>
+              <a:latin typeface="Arial"/>
+            </a:endParaRPr>
+          </a:p>
+          <a:p>
+            <a:pPr lvl="5" marL="2592000" indent="-216000">
+              <a:spcBef>
+                <a:spcPts val="283"/>
+              </a:spcBef>
+              <a:buClr>
+                <a:srgbClr val="000000"/>
+              </a:buClr>
+              <a:buSzPct val="45000"/>
+              <a:buFont typeface="Wingdings" charset="2"/>
+              <a:buChar char=""/>
+            </a:pPr>
+            <a:r>
+              <a:rPr b="0" lang="ru-RU" sz="1800" strike="noStrike" u="none">
+                <a:solidFill>
+                  <a:srgbClr val="000000"/>
+                </a:solidFill>
+                <a:effectLst/>
+                <a:uFillTx/>
+                <a:latin typeface="Arial"/>
+              </a:rPr>
+              <a:t>Шестой уровень структуры</a:t>
+            </a:r>
+            <a:endParaRPr b="0" lang="ru-RU" sz="1800" strike="noStrike" u="none">
+              <a:solidFill>
+                <a:srgbClr val="000000"/>
+              </a:solidFill>
+              <a:effectLst/>
+              <a:uFillTx/>
+              <a:latin typeface="Arial"/>
+            </a:endParaRPr>
+          </a:p>
+          <a:p>
+            <a:pPr lvl="6" marL="3024000" indent="-216000">
+              <a:spcBef>
+                <a:spcPts val="283"/>
+              </a:spcBef>
+              <a:buClr>
+                <a:srgbClr val="000000"/>
+              </a:buClr>
+              <a:buSzPct val="45000"/>
+              <a:buFont typeface="Wingdings" charset="2"/>
+              <a:buChar char=""/>
+            </a:pPr>
+            <a:r>
+              <a:rPr b="0" lang="ru-RU" sz="1800" strike="noStrike" u="none">
+                <a:solidFill>
+                  <a:srgbClr val="000000"/>
+                </a:solidFill>
+                <a:effectLst/>
+                <a:uFillTx/>
+                <a:latin typeface="Arial"/>
+              </a:rPr>
+              <a:t>Седьмой уровень структуры</a:t>
+            </a:r>
+            <a:endParaRPr b="0" lang="ru-RU" sz="1800" strike="noStrike" u="none">
               <a:solidFill>
                 <a:srgbClr val="000000"/>
               </a:solidFill>
@@ -291,62 +895,223 @@
       </p:sp>
       <p:sp>
         <p:nvSpPr>
-          <p:cNvPr id="4" name="PlaceHolder 3"/>
+          <p:cNvPr id="9" name="PlaceHolder 3"/>
           <p:cNvSpPr>
             <a:spLocks noGrp="1"/>
           </p:cNvSpPr>
           <p:nvPr>
-            <p:ph type="ftr" idx="2"/>
+            <p:ph type="ftr" idx="4"/>
           </p:nvPr>
         </p:nvSpPr>
-        <p:spPr/>
+        <p:spPr>
+          <a:xfrm>
+            <a:off x="3447360" y="5165280"/>
+            <a:ext cx="3194640" cy="390240"/>
+          </a:xfrm>
+          <a:prstGeom prst="rect">
+            <a:avLst/>
+          </a:prstGeom>
+          <a:noFill/>
+          <a:ln w="0">
+            <a:noFill/>
+          </a:ln>
+        </p:spPr>
         <p:txBody>
-          <a:bodyPr/>
-          <a:p>
-            <a:r>
-              <a:t>Footer</a:t>
-            </a:r>
+          <a:bodyPr lIns="0" rIns="0" tIns="0" bIns="0" anchor="t">
+            <a:noAutofit/>
+          </a:bodyPr>
+          <a:lstStyle>
+            <a:lvl1pPr indent="0" algn="ctr">
+              <a:lnSpc>
+                <a:spcPct val="100000"/>
+              </a:lnSpc>
+              <a:buNone/>
+              <a:tabLst>
+                <a:tab algn="l" pos="0"/>
+              </a:tabLst>
+              <a:defRPr b="0" lang="ru-RU" sz="1400" strike="noStrike" u="none">
+                <a:solidFill>
+                  <a:srgbClr val="000000"/>
+                </a:solidFill>
+                <a:effectLst/>
+                <a:uFillTx/>
+                <a:latin typeface="Times New Roman"/>
+              </a:defRPr>
+            </a:lvl1pPr>
+          </a:lstStyle>
+          <a:p>
+            <a:pPr indent="0" algn="ctr">
+              <a:lnSpc>
+                <a:spcPct val="100000"/>
+              </a:lnSpc>
+              <a:buNone/>
+              <a:tabLst>
+                <a:tab algn="l" pos="0"/>
+              </a:tabLst>
+            </a:pPr>
+            <a:r>
+              <a:rPr b="0" lang="ru-RU" sz="1400" strike="noStrike" u="none">
+                <a:solidFill>
+                  <a:srgbClr val="000000"/>
+                </a:solidFill>
+                <a:effectLst/>
+                <a:uFillTx/>
+                <a:latin typeface="Times New Roman"/>
+              </a:rPr>
+              <a:t>&lt;нижний колонтитул&gt;</a:t>
+            </a:r>
+            <a:endParaRPr b="0" lang="ru-RU" sz="1400" strike="noStrike" u="none">
+              <a:solidFill>
+                <a:srgbClr val="000000"/>
+              </a:solidFill>
+              <a:effectLst/>
+              <a:uFillTx/>
+              <a:latin typeface="Times New Roman"/>
+            </a:endParaRPr>
           </a:p>
         </p:txBody>
       </p:sp>
       <p:sp>
         <p:nvSpPr>
-          <p:cNvPr id="5" name="PlaceHolder 4"/>
+          <p:cNvPr id="10" name="PlaceHolder 4"/>
           <p:cNvSpPr>
             <a:spLocks noGrp="1"/>
           </p:cNvSpPr>
           <p:nvPr>
-            <p:ph type="sldNum" idx="3"/>
+            <p:ph type="sldNum" idx="5"/>
           </p:nvPr>
         </p:nvSpPr>
-        <p:spPr/>
+        <p:spPr>
+          <a:xfrm>
+            <a:off x="7227360" y="5165280"/>
+            <a:ext cx="2347920" cy="390240"/>
+          </a:xfrm>
+          <a:prstGeom prst="rect">
+            <a:avLst/>
+          </a:prstGeom>
+          <a:noFill/>
+          <a:ln w="0">
+            <a:noFill/>
+          </a:ln>
+        </p:spPr>
         <p:txBody>
-          <a:bodyPr/>
-          <a:p>
-            <a:fld id="{4219B4B9-97BF-4E9E-AAA8-8280E522ADB8}" type="slidenum">
-              <a:t>&lt;#&gt;</a:t>
+          <a:bodyPr lIns="0" rIns="0" tIns="0" bIns="0" anchor="t">
+            <a:noAutofit/>
+          </a:bodyPr>
+          <a:lstStyle>
+            <a:lvl1pPr indent="0" algn="r">
+              <a:lnSpc>
+                <a:spcPct val="100000"/>
+              </a:lnSpc>
+              <a:buNone/>
+              <a:tabLst>
+                <a:tab algn="l" pos="0"/>
+              </a:tabLst>
+              <a:defRPr b="0" lang="ru-RU" sz="1400" strike="noStrike" u="none">
+                <a:solidFill>
+                  <a:srgbClr val="000000"/>
+                </a:solidFill>
+                <a:effectLst/>
+                <a:uFillTx/>
+                <a:latin typeface="Times New Roman"/>
+              </a:defRPr>
+            </a:lvl1pPr>
+          </a:lstStyle>
+          <a:p>
+            <a:pPr indent="0" algn="r">
+              <a:lnSpc>
+                <a:spcPct val="100000"/>
+              </a:lnSpc>
+              <a:buNone/>
+              <a:tabLst>
+                <a:tab algn="l" pos="0"/>
+              </a:tabLst>
+            </a:pPr>
+            <a:fld id="{8BE0B1B8-9B9D-4533-89CE-8E59D6626A19}" type="slidenum">
+              <a:rPr b="0" lang="ru-RU" sz="1400" strike="noStrike" u="none">
+                <a:solidFill>
+                  <a:srgbClr val="000000"/>
+                </a:solidFill>
+                <a:effectLst/>
+                <a:uFillTx/>
+                <a:latin typeface="Times New Roman"/>
+              </a:rPr>
+              <a:t>&lt;номер&gt;</a:t>
             </a:fld>
+            <a:endParaRPr b="0" lang="ru-RU" sz="1400" strike="noStrike" u="none">
+              <a:solidFill>
+                <a:srgbClr val="000000"/>
+              </a:solidFill>
+              <a:effectLst/>
+              <a:uFillTx/>
+              <a:latin typeface="Times New Roman"/>
+            </a:endParaRPr>
           </a:p>
         </p:txBody>
       </p:sp>
       <p:sp>
         <p:nvSpPr>
-          <p:cNvPr id="6" name="PlaceHolder 5"/>
+          <p:cNvPr id="11" name="PlaceHolder 5"/>
           <p:cNvSpPr>
             <a:spLocks noGrp="1"/>
           </p:cNvSpPr>
           <p:nvPr>
-            <p:ph type="dt" idx="1"/>
+            <p:ph type="dt" idx="6"/>
           </p:nvPr>
         </p:nvSpPr>
-        <p:spPr/>
+        <p:spPr>
+          <a:xfrm>
+            <a:off x="504000" y="5165280"/>
+            <a:ext cx="2347920" cy="390240"/>
+          </a:xfrm>
+          <a:prstGeom prst="rect">
+            <a:avLst/>
+          </a:prstGeom>
+          <a:noFill/>
+          <a:ln w="0">
+            <a:noFill/>
+          </a:ln>
+        </p:spPr>
         <p:txBody>
-          <a:bodyPr/>
-          <a:p>
-            <a:r>
-              <a:rPr lang="ru-RU"/>
-              <a:t/>
-            </a:r>
+          <a:bodyPr lIns="0" rIns="0" tIns="0" bIns="0" anchor="t">
+            <a:noAutofit/>
+          </a:bodyPr>
+          <a:lstStyle>
+            <a:lvl1pPr indent="0">
+              <a:buNone/>
+              <a:defRPr b="0" lang="ru-RU" sz="1400" strike="noStrike" u="none">
+                <a:solidFill>
+                  <a:srgbClr val="000000"/>
+                </a:solidFill>
+                <a:effectLst/>
+                <a:uFillTx/>
+                <a:latin typeface="Times New Roman"/>
+              </a:defRPr>
+            </a:lvl1pPr>
+          </a:lstStyle>
+          <a:p>
+            <a:pPr indent="0">
+              <a:buNone/>
+            </a:pPr>
+            <a:r>
+              <a:rPr b="0" lang="ru-RU" sz="1400" strike="noStrike" u="none">
+                <a:solidFill>
+                  <a:srgbClr val="000000"/>
+                </a:solidFill>
+                <a:effectLst/>
+                <a:uFillTx/>
+                <a:latin typeface="Times New Roman"/>
+              </a:rPr>
+              <a:t>&lt;дата/время&gt;</a:t>
+            </a:r>
+            <a:endParaRPr b="0" lang="ru-RU" sz="1400" strike="noStrike" u="none">
+              <a:solidFill>
+                <a:srgbClr val="000000"/>
+              </a:solidFill>
+              <a:effectLst/>
+              <a:uFillTx/>
+              <a:latin typeface="Times New Roman"/>
+            </a:endParaRPr>
           </a:p>
         </p:txBody>
       </p:sp>
@@ -372,510 +1137,6 @@
           <a:chExt cx="0" cy="0"/>
         </a:xfrm>
       </p:grpSpPr>
-      <p:sp>
-        <p:nvSpPr>
-          <p:cNvPr id="2" name="PlaceHolder 1"/>
-          <p:cNvSpPr>
-            <a:spLocks noGrp="1"/>
-          </p:cNvSpPr>
-          <p:nvPr>
-            <p:ph type="title"/>
-          </p:nvPr>
-        </p:nvSpPr>
-        <p:spPr>
-          <a:xfrm>
-            <a:off x="504000" y="226080"/>
-            <a:ext cx="9071640" cy="946440"/>
-          </a:xfrm>
-          <a:prstGeom prst="rect">
-            <a:avLst/>
-          </a:prstGeom>
-          <a:noFill/>
-          <a:ln w="0">
-            <a:noFill/>
-          </a:ln>
-        </p:spPr>
-        <p:txBody>
-          <a:bodyPr lIns="0" rIns="0" tIns="0" bIns="0" anchor="ctr">
-            <a:noAutofit/>
-          </a:bodyPr>
-          <a:p>
-            <a:pPr indent="0" algn="ctr">
-              <a:buNone/>
-            </a:pPr>
-            <a:r>
-              <a:rPr b="0" lang="ru-RU" sz="4400" strike="noStrike" u="none">
-                <a:solidFill>
-                  <a:srgbClr val="000000"/>
-                </a:solidFill>
-                <a:effectLst/>
-                <a:uFillTx/>
-                <a:latin typeface="Arial"/>
-              </a:rPr>
-              <a:t>Для правки текста заглавия щёлкните мышью</a:t>
-            </a:r>
-            <a:endParaRPr b="0" lang="ru-RU" sz="4400" strike="noStrike" u="none">
-              <a:solidFill>
-                <a:srgbClr val="000000"/>
-              </a:solidFill>
-              <a:effectLst/>
-              <a:uFillTx/>
-              <a:latin typeface="Arial"/>
-            </a:endParaRPr>
-          </a:p>
-        </p:txBody>
-      </p:sp>
-      <p:sp>
-        <p:nvSpPr>
-          <p:cNvPr id="3" name="PlaceHolder 2"/>
-          <p:cNvSpPr>
-            <a:spLocks noGrp="1"/>
-          </p:cNvSpPr>
-          <p:nvPr>
-            <p:ph type="body"/>
-          </p:nvPr>
-        </p:nvSpPr>
-        <p:spPr>
-          <a:xfrm>
-            <a:off x="504000" y="1326600"/>
-            <a:ext cx="9071640" cy="3288240"/>
-          </a:xfrm>
-          <a:prstGeom prst="rect">
-            <a:avLst/>
-          </a:prstGeom>
-          <a:noFill/>
-          <a:ln w="0">
-            <a:noFill/>
-          </a:ln>
-        </p:spPr>
-        <p:txBody>
-          <a:bodyPr lIns="0" rIns="0" tIns="0" bIns="0" anchor="t">
-            <a:normAutofit/>
-          </a:bodyPr>
-          <a:p>
-            <a:pPr marL="432000" indent="-324000">
-              <a:spcBef>
-                <a:spcPts val="1417"/>
-              </a:spcBef>
-              <a:buClr>
-                <a:srgbClr val="000000"/>
-              </a:buClr>
-              <a:buSzPct val="45000"/>
-              <a:buFont typeface="Wingdings" charset="2"/>
-              <a:buChar char=""/>
-            </a:pPr>
-            <a:r>
-              <a:rPr b="0" lang="ru-RU" sz="3200" strike="noStrike" u="none">
-                <a:solidFill>
-                  <a:srgbClr val="000000"/>
-                </a:solidFill>
-                <a:effectLst/>
-                <a:uFillTx/>
-                <a:latin typeface="Arial"/>
-              </a:rPr>
-              <a:t>Для правки структуры щёлкните мышью</a:t>
-            </a:r>
-            <a:endParaRPr b="0" lang="ru-RU" sz="3200" strike="noStrike" u="none">
-              <a:solidFill>
-                <a:srgbClr val="000000"/>
-              </a:solidFill>
-              <a:effectLst/>
-              <a:uFillTx/>
-              <a:latin typeface="Arial"/>
-            </a:endParaRPr>
-          </a:p>
-          <a:p>
-            <a:pPr lvl="1" marL="864000" indent="-324000">
-              <a:spcBef>
-                <a:spcPts val="1134"/>
-              </a:spcBef>
-              <a:buClr>
-                <a:srgbClr val="000000"/>
-              </a:buClr>
-              <a:buSzPct val="75000"/>
-              <a:buFont typeface="Symbol" charset="2"/>
-              <a:buChar char=""/>
-            </a:pPr>
-            <a:r>
-              <a:rPr b="0" lang="ru-RU" sz="2800" strike="noStrike" u="none">
-                <a:solidFill>
-                  <a:srgbClr val="000000"/>
-                </a:solidFill>
-                <a:effectLst/>
-                <a:uFillTx/>
-                <a:latin typeface="Arial"/>
-              </a:rPr>
-              <a:t>Второй уровень структуры</a:t>
-            </a:r>
-            <a:endParaRPr b="0" lang="ru-RU" sz="2800" strike="noStrike" u="none">
-              <a:solidFill>
-                <a:srgbClr val="000000"/>
-              </a:solidFill>
-              <a:effectLst/>
-              <a:uFillTx/>
-              <a:latin typeface="Arial"/>
-            </a:endParaRPr>
-          </a:p>
-          <a:p>
-            <a:pPr lvl="2" marL="1296000" indent="-288000">
-              <a:spcBef>
-                <a:spcPts val="850"/>
-              </a:spcBef>
-              <a:buClr>
-                <a:srgbClr val="000000"/>
-              </a:buClr>
-              <a:buSzPct val="45000"/>
-              <a:buFont typeface="Wingdings" charset="2"/>
-              <a:buChar char=""/>
-            </a:pPr>
-            <a:r>
-              <a:rPr b="0" lang="ru-RU" sz="2400" strike="noStrike" u="none">
-                <a:solidFill>
-                  <a:srgbClr val="000000"/>
-                </a:solidFill>
-                <a:effectLst/>
-                <a:uFillTx/>
-                <a:latin typeface="Arial"/>
-              </a:rPr>
-              <a:t>Третий уровень структуры</a:t>
-            </a:r>
-            <a:endParaRPr b="0" lang="ru-RU" sz="2400" strike="noStrike" u="none">
-              <a:solidFill>
-                <a:srgbClr val="000000"/>
-              </a:solidFill>
-              <a:effectLst/>
-              <a:uFillTx/>
-              <a:latin typeface="Arial"/>
-            </a:endParaRPr>
-          </a:p>
-          <a:p>
-            <a:pPr lvl="3" marL="1728000" indent="-216000">
-              <a:spcBef>
-                <a:spcPts val="567"/>
-              </a:spcBef>
-              <a:buClr>
-                <a:srgbClr val="000000"/>
-              </a:buClr>
-              <a:buSzPct val="75000"/>
-              <a:buFont typeface="Symbol" charset="2"/>
-              <a:buChar char=""/>
-            </a:pPr>
-            <a:r>
-              <a:rPr b="0" lang="ru-RU" sz="2000" strike="noStrike" u="none">
-                <a:solidFill>
-                  <a:srgbClr val="000000"/>
-                </a:solidFill>
-                <a:effectLst/>
-                <a:uFillTx/>
-                <a:latin typeface="Arial"/>
-              </a:rPr>
-              <a:t>Четвёртый уровень структуры</a:t>
-            </a:r>
-            <a:endParaRPr b="0" lang="ru-RU" sz="2000" strike="noStrike" u="none">
-              <a:solidFill>
-                <a:srgbClr val="000000"/>
-              </a:solidFill>
-              <a:effectLst/>
-              <a:uFillTx/>
-              <a:latin typeface="Arial"/>
-            </a:endParaRPr>
-          </a:p>
-          <a:p>
-            <a:pPr lvl="4" marL="2160000" indent="-216000">
-              <a:spcBef>
-                <a:spcPts val="283"/>
-              </a:spcBef>
-              <a:buClr>
-                <a:srgbClr val="000000"/>
-              </a:buClr>
-              <a:buSzPct val="45000"/>
-              <a:buFont typeface="Wingdings" charset="2"/>
-              <a:buChar char=""/>
-            </a:pPr>
-            <a:r>
-              <a:rPr b="0" lang="ru-RU" sz="2000" strike="noStrike" u="none">
-                <a:solidFill>
-                  <a:srgbClr val="000000"/>
-                </a:solidFill>
-                <a:effectLst/>
-                <a:uFillTx/>
-                <a:latin typeface="Arial"/>
-              </a:rPr>
-              <a:t>Пятый уровень структуры</a:t>
-            </a:r>
-            <a:endParaRPr b="0" lang="ru-RU" sz="2000" strike="noStrike" u="none">
-              <a:solidFill>
-                <a:srgbClr val="000000"/>
-              </a:solidFill>
-              <a:effectLst/>
-              <a:uFillTx/>
-              <a:latin typeface="Arial"/>
-            </a:endParaRPr>
-          </a:p>
-          <a:p>
-            <a:pPr lvl="5" marL="2592000" indent="-216000">
-              <a:spcBef>
-                <a:spcPts val="283"/>
-              </a:spcBef>
-              <a:buClr>
-                <a:srgbClr val="000000"/>
-              </a:buClr>
-              <a:buSzPct val="45000"/>
-              <a:buFont typeface="Wingdings" charset="2"/>
-              <a:buChar char=""/>
-            </a:pPr>
-            <a:r>
-              <a:rPr b="0" lang="ru-RU" sz="2000" strike="noStrike" u="none">
-                <a:solidFill>
-                  <a:srgbClr val="000000"/>
-                </a:solidFill>
-                <a:effectLst/>
-                <a:uFillTx/>
-                <a:latin typeface="Arial"/>
-              </a:rPr>
-              <a:t>Шестой уровень структуры</a:t>
-            </a:r>
-            <a:endParaRPr b="0" lang="ru-RU" sz="2000" strike="noStrike" u="none">
-              <a:solidFill>
-                <a:srgbClr val="000000"/>
-              </a:solidFill>
-              <a:effectLst/>
-              <a:uFillTx/>
-              <a:latin typeface="Arial"/>
-            </a:endParaRPr>
-          </a:p>
-          <a:p>
-            <a:pPr lvl="6" marL="3024000" indent="-216000">
-              <a:spcBef>
-                <a:spcPts val="283"/>
-              </a:spcBef>
-              <a:buClr>
-                <a:srgbClr val="000000"/>
-              </a:buClr>
-              <a:buSzPct val="45000"/>
-              <a:buFont typeface="Wingdings" charset="2"/>
-              <a:buChar char=""/>
-            </a:pPr>
-            <a:r>
-              <a:rPr b="0" lang="ru-RU" sz="2000" strike="noStrike" u="none">
-                <a:solidFill>
-                  <a:srgbClr val="000000"/>
-                </a:solidFill>
-                <a:effectLst/>
-                <a:uFillTx/>
-                <a:latin typeface="Arial"/>
-              </a:rPr>
-              <a:t>Седьмой уровень структуры</a:t>
-            </a:r>
-            <a:endParaRPr b="0" lang="ru-RU" sz="2000" strike="noStrike" u="none">
-              <a:solidFill>
-                <a:srgbClr val="000000"/>
-              </a:solidFill>
-              <a:effectLst/>
-              <a:uFillTx/>
-              <a:latin typeface="Arial"/>
-            </a:endParaRPr>
-          </a:p>
-        </p:txBody>
-      </p:sp>
-      <p:sp>
-        <p:nvSpPr>
-          <p:cNvPr id="4" name="PlaceHolder 3"/>
-          <p:cNvSpPr>
-            <a:spLocks noGrp="1"/>
-          </p:cNvSpPr>
-          <p:nvPr>
-            <p:ph type="dt" idx="1"/>
-          </p:nvPr>
-        </p:nvSpPr>
-        <p:spPr>
-          <a:xfrm>
-            <a:off x="504000" y="5165280"/>
-            <a:ext cx="2348280" cy="390600"/>
-          </a:xfrm>
-          <a:prstGeom prst="rect">
-            <a:avLst/>
-          </a:prstGeom>
-          <a:noFill/>
-          <a:ln w="0">
-            <a:noFill/>
-          </a:ln>
-        </p:spPr>
-        <p:txBody>
-          <a:bodyPr lIns="0" rIns="0" tIns="0" bIns="0" anchor="t">
-            <a:noAutofit/>
-          </a:bodyPr>
-          <a:lstStyle>
-            <a:lvl1pPr indent="0">
-              <a:buNone/>
-              <a:defRPr b="0" lang="ru-RU" sz="1400" strike="noStrike" u="none">
-                <a:solidFill>
-                  <a:srgbClr val="000000"/>
-                </a:solidFill>
-                <a:effectLst/>
-                <a:uFillTx/>
-                <a:latin typeface="Times New Roman"/>
-              </a:defRPr>
-            </a:lvl1pPr>
-          </a:lstStyle>
-          <a:p>
-            <a:pPr indent="0">
-              <a:buNone/>
-            </a:pPr>
-            <a:r>
-              <a:rPr b="0" lang="ru-RU" sz="1400" strike="noStrike" u="none">
-                <a:solidFill>
-                  <a:srgbClr val="000000"/>
-                </a:solidFill>
-                <a:effectLst/>
-                <a:uFillTx/>
-                <a:latin typeface="Times New Roman"/>
-              </a:rPr>
-              <a:t>&lt;дата/время&gt;</a:t>
-            </a:r>
-            <a:endParaRPr b="0" lang="ru-RU" sz="1400" strike="noStrike" u="none">
-              <a:solidFill>
-                <a:srgbClr val="000000"/>
-              </a:solidFill>
-              <a:effectLst/>
-              <a:uFillTx/>
-              <a:latin typeface="Times New Roman"/>
-            </a:endParaRPr>
-          </a:p>
-        </p:txBody>
-      </p:sp>
-      <p:sp>
-        <p:nvSpPr>
-          <p:cNvPr id="5" name="PlaceHolder 4"/>
-          <p:cNvSpPr>
-            <a:spLocks noGrp="1"/>
-          </p:cNvSpPr>
-          <p:nvPr>
-            <p:ph type="ftr" idx="2"/>
-          </p:nvPr>
-        </p:nvSpPr>
-        <p:spPr>
-          <a:xfrm>
-            <a:off x="3447360" y="5165280"/>
-            <a:ext cx="3195000" cy="390600"/>
-          </a:xfrm>
-          <a:prstGeom prst="rect">
-            <a:avLst/>
-          </a:prstGeom>
-          <a:noFill/>
-          <a:ln w="0">
-            <a:noFill/>
-          </a:ln>
-        </p:spPr>
-        <p:txBody>
-          <a:bodyPr lIns="0" rIns="0" tIns="0" bIns="0" anchor="t">
-            <a:noAutofit/>
-          </a:bodyPr>
-          <a:lstStyle>
-            <a:lvl1pPr indent="0" algn="ctr">
-              <a:buNone/>
-              <a:defRPr b="0" lang="ru-RU" sz="1400" strike="noStrike" u="none">
-                <a:solidFill>
-                  <a:srgbClr val="000000"/>
-                </a:solidFill>
-                <a:effectLst/>
-                <a:uFillTx/>
-                <a:latin typeface="Times New Roman"/>
-              </a:defRPr>
-            </a:lvl1pPr>
-          </a:lstStyle>
-          <a:p>
-            <a:pPr indent="0" algn="ctr">
-              <a:buNone/>
-            </a:pPr>
-            <a:r>
-              <a:rPr b="0" lang="ru-RU" sz="1400" strike="noStrike" u="none">
-                <a:solidFill>
-                  <a:srgbClr val="000000"/>
-                </a:solidFill>
-                <a:effectLst/>
-                <a:uFillTx/>
-                <a:latin typeface="Times New Roman"/>
-              </a:rPr>
-              <a:t>&lt;нижний колонтитул&gt;</a:t>
-            </a:r>
-            <a:endParaRPr b="0" lang="ru-RU" sz="1400" strike="noStrike" u="none">
-              <a:solidFill>
-                <a:srgbClr val="000000"/>
-              </a:solidFill>
-              <a:effectLst/>
-              <a:uFillTx/>
-              <a:latin typeface="Times New Roman"/>
-            </a:endParaRPr>
-          </a:p>
-        </p:txBody>
-      </p:sp>
-      <p:sp>
-        <p:nvSpPr>
-          <p:cNvPr id="6" name="PlaceHolder 5"/>
-          <p:cNvSpPr>
-            <a:spLocks noGrp="1"/>
-          </p:cNvSpPr>
-          <p:nvPr>
-            <p:ph type="sldNum" idx="3"/>
-          </p:nvPr>
-        </p:nvSpPr>
-        <p:spPr>
-          <a:xfrm>
-            <a:off x="7227360" y="5165280"/>
-            <a:ext cx="2348280" cy="390600"/>
-          </a:xfrm>
-          <a:prstGeom prst="rect">
-            <a:avLst/>
-          </a:prstGeom>
-          <a:noFill/>
-          <a:ln w="0">
-            <a:noFill/>
-          </a:ln>
-        </p:spPr>
-        <p:txBody>
-          <a:bodyPr lIns="0" rIns="0" tIns="0" bIns="0" anchor="t">
-            <a:noAutofit/>
-          </a:bodyPr>
-          <a:lstStyle>
-            <a:lvl1pPr indent="0" algn="r">
-              <a:buNone/>
-              <a:defRPr b="0" lang="ru-RU" sz="1400" strike="noStrike" u="none">
-                <a:solidFill>
-                  <a:srgbClr val="000000"/>
-                </a:solidFill>
-                <a:effectLst/>
-                <a:uFillTx/>
-                <a:latin typeface="Times New Roman"/>
-              </a:defRPr>
-            </a:lvl1pPr>
-          </a:lstStyle>
-          <a:p>
-            <a:pPr indent="0" algn="r">
-              <a:buNone/>
-            </a:pPr>
-            <a:fld id="{E12B26BC-BBF3-4148-AE31-D43BBB4E3C79}" type="slidenum">
-              <a:rPr b="0" lang="ru-RU" sz="1400" strike="noStrike" u="none">
-                <a:solidFill>
-                  <a:srgbClr val="000000"/>
-                </a:solidFill>
-                <a:effectLst/>
-                <a:uFillTx/>
-                <a:latin typeface="Times New Roman"/>
-              </a:rPr>
-              <a:t>&lt;номер&gt;</a:t>
-            </a:fld>
-            <a:endParaRPr b="0" lang="ru-RU" sz="1400" strike="noStrike" u="none">
-              <a:solidFill>
-                <a:srgbClr val="000000"/>
-              </a:solidFill>
-              <a:effectLst/>
-              <a:uFillTx/>
-              <a:latin typeface="Times New Roman"/>
-            </a:endParaRPr>
-          </a:p>
-        </p:txBody>
-      </p:sp>
     </p:spTree>
   </p:cSld>
   <p:clrMap bg1="lt1" tx1="dk1" bg2="lt2" tx2="dk2" accent1="accent1" accent2="accent2" accent3="accent3" accent4="accent4" accent5="accent5" accent6="accent6" hlink="hlink" folHlink="folHlink"/>
@@ -905,7 +1166,7 @@
       </p:grpSpPr>
       <p:sp>
         <p:nvSpPr>
-          <p:cNvPr id="11" name="PlaceHolder 1"/>
+          <p:cNvPr id="12" name="PlaceHolder 1"/>
           <p:cNvSpPr>
             <a:spLocks noGrp="1"/>
           </p:cNvSpPr>
@@ -915,8 +1176,8 @@
         </p:nvSpPr>
         <p:spPr>
           <a:xfrm>
-            <a:off x="504000" y="226080"/>
-            <a:ext cx="9071640" cy="946440"/>
+            <a:off x="504000" y="225720"/>
+            <a:ext cx="9071280" cy="946800"/>
           </a:xfrm>
           <a:prstGeom prst="rect">
             <a:avLst/>
@@ -932,7 +1193,13 @@
           </a:bodyPr>
           <a:p>
             <a:pPr indent="0" algn="ctr">
+              <a:lnSpc>
+                <a:spcPct val="100000"/>
+              </a:lnSpc>
               <a:buNone/>
+              <a:tabLst>
+                <a:tab algn="l" pos="0"/>
+              </a:tabLst>
             </a:pPr>
             <a:r>
               <a:rPr b="0" lang="ru-RU" sz="4400" strike="noStrike" u="none">
@@ -941,7 +1208,7 @@
                 </a:solidFill>
                 <a:effectLst/>
                 <a:uFillTx/>
-                <a:latin typeface="Arial"/>
+                <a:latin typeface="Noto Sans"/>
               </a:rPr>
               <a:t>Дмитрий Донской</a:t>
             </a:r>
@@ -951,14 +1218,14 @@
               </a:solidFill>
               <a:effectLst/>
               <a:uFillTx/>
-              <a:latin typeface="Arial"/>
+              <a:latin typeface="Noto Sans"/>
             </a:endParaRPr>
           </a:p>
         </p:txBody>
       </p:sp>
       <p:sp>
         <p:nvSpPr>
-          <p:cNvPr id="12" name="PlaceHolder 2"/>
+          <p:cNvPr id="13" name="PlaceHolder 2"/>
           <p:cNvSpPr>
             <a:spLocks noGrp="1"/>
           </p:cNvSpPr>
@@ -968,8 +1235,8 @@
         </p:nvSpPr>
         <p:spPr>
           <a:xfrm>
-            <a:off x="504000" y="1326600"/>
-            <a:ext cx="9071640" cy="3288240"/>
+            <a:off x="504000" y="1326240"/>
+            <a:ext cx="9071280" cy="3288600"/>
           </a:xfrm>
           <a:prstGeom prst="rect">
             <a:avLst/>
@@ -985,7 +1252,13 @@
           </a:bodyPr>
           <a:p>
             <a:pPr indent="0" algn="ctr">
+              <a:lnSpc>
+                <a:spcPct val="100000"/>
+              </a:lnSpc>
               <a:buNone/>
+              <a:tabLst>
+                <a:tab algn="l" pos="0"/>
+              </a:tabLst>
             </a:pPr>
             <a:r>
               <a:rPr b="0" lang="ru-RU" sz="3200" strike="noStrike" u="none">
@@ -994,7 +1267,7 @@
                 </a:solidFill>
                 <a:effectLst/>
                 <a:uFillTx/>
-                <a:latin typeface="Arial"/>
+                <a:latin typeface="Noto Sans"/>
               </a:rPr>
               <a:t>Доклад подготовили: студенты группы БСТ2502 Зинченко Станислав и Кочкин Иван</a:t>
             </a:r>
@@ -1004,7 +1277,7 @@
               </a:solidFill>
               <a:effectLst/>
               <a:uFillTx/>
-              <a:latin typeface="Arial"/>
+              <a:latin typeface="Noto Sans"/>
             </a:endParaRPr>
           </a:p>
         </p:txBody>
@@ -1041,7 +1314,7 @@
       </p:grpSpPr>
       <p:sp>
         <p:nvSpPr>
-          <p:cNvPr id="13" name="PlaceHolder 1"/>
+          <p:cNvPr id="14" name="PlaceHolder 1"/>
           <p:cNvSpPr>
             <a:spLocks noGrp="1"/>
           </p:cNvSpPr>
@@ -1051,8 +1324,8 @@
         </p:nvSpPr>
         <p:spPr>
           <a:xfrm>
-            <a:off x="504000" y="226080"/>
-            <a:ext cx="9071640" cy="946440"/>
+            <a:off x="504000" y="225720"/>
+            <a:ext cx="9071280" cy="946800"/>
           </a:xfrm>
           <a:prstGeom prst="rect">
             <a:avLst/>
@@ -1068,7 +1341,13 @@
           </a:bodyPr>
           <a:p>
             <a:pPr indent="0" algn="ctr">
+              <a:lnSpc>
+                <a:spcPct val="100000"/>
+              </a:lnSpc>
               <a:buNone/>
+              <a:tabLst>
+                <a:tab algn="l" pos="0"/>
+              </a:tabLst>
             </a:pPr>
             <a:r>
               <a:rPr b="0" lang="ru-RU" sz="4400" strike="noStrike" u="none">
@@ -1077,7 +1356,7 @@
                 </a:solidFill>
                 <a:effectLst/>
                 <a:uFillTx/>
-                <a:latin typeface="Arial"/>
+                <a:latin typeface="Noto Sans"/>
               </a:rPr>
               <a:t>Биография</a:t>
             </a:r>
@@ -1087,14 +1366,14 @@
               </a:solidFill>
               <a:effectLst/>
               <a:uFillTx/>
-              <a:latin typeface="Arial"/>
+              <a:latin typeface="Noto Sans"/>
             </a:endParaRPr>
           </a:p>
         </p:txBody>
       </p:sp>
       <p:sp>
         <p:nvSpPr>
-          <p:cNvPr id="14" name="PlaceHolder 2"/>
+          <p:cNvPr id="15" name="PlaceHolder 2"/>
           <p:cNvSpPr>
             <a:spLocks noGrp="1"/>
           </p:cNvSpPr>
@@ -1105,7 +1384,7 @@
         <p:spPr>
           <a:xfrm>
             <a:off x="504000" y="1326600"/>
-            <a:ext cx="6360840" cy="3288240"/>
+            <a:ext cx="6360480" cy="3533400"/>
           </a:xfrm>
           <a:prstGeom prst="rect">
             <a:avLst/>
@@ -1116,11 +1395,14 @@
           </a:ln>
         </p:spPr>
         <p:txBody>
-          <a:bodyPr lIns="0" rIns="0" tIns="0" bIns="0" anchor="t">
+          <a:bodyPr lIns="0" rIns="0" tIns="0" bIns="0" anchor="ctr">
             <a:normAutofit/>
           </a:bodyPr>
           <a:p>
             <a:pPr marL="432000" indent="-324000">
+              <a:lnSpc>
+                <a:spcPct val="100000"/>
+              </a:lnSpc>
               <a:spcBef>
                 <a:spcPts val="1417"/>
               </a:spcBef>
@@ -1132,27 +1414,30 @@
               <a:buChar char=""/>
             </a:pPr>
             <a:r>
-              <a:rPr b="0" lang="ru-RU" sz="3200" strike="noStrike" u="none">
-                <a:solidFill>
-                  <a:srgbClr val="000000"/>
-                </a:solidFill>
-                <a:effectLst/>
-                <a:uFillTx/>
-                <a:latin typeface="Arial"/>
+              <a:rPr b="0" lang="ru-RU" sz="2800" strike="noStrike" u="none">
+                <a:solidFill>
+                  <a:srgbClr val="000000"/>
+                </a:solidFill>
+                <a:effectLst/>
+                <a:uFillTx/>
+                <a:latin typeface="Noto Sans"/>
               </a:rPr>
               <a:t>1350 — 1389 гг.</a:t>
             </a:r>
-            <a:endParaRPr b="0" lang="ru-RU" sz="3200" strike="noStrike" u="none">
-              <a:solidFill>
-                <a:srgbClr val="000000"/>
-              </a:solidFill>
-              <a:effectLst/>
-              <a:uFillTx/>
-              <a:latin typeface="Arial"/>
+            <a:endParaRPr b="0" lang="ru-RU" sz="2800" strike="noStrike" u="none">
+              <a:solidFill>
+                <a:srgbClr val="000000"/>
+              </a:solidFill>
+              <a:effectLst/>
+              <a:uFillTx/>
+              <a:latin typeface="Noto Sans"/>
             </a:endParaRPr>
           </a:p>
           <a:p>
             <a:pPr marL="432000" indent="-324000">
+              <a:lnSpc>
+                <a:spcPct val="100000"/>
+              </a:lnSpc>
               <a:spcBef>
                 <a:spcPts val="1417"/>
               </a:spcBef>
@@ -1164,30 +1449,65 @@
               <a:buChar char=""/>
             </a:pPr>
             <a:r>
-              <a:rPr b="0" lang="ru-RU" sz="3200" strike="noStrike" u="none">
-                <a:solidFill>
-                  <a:srgbClr val="000000"/>
-                </a:solidFill>
-                <a:effectLst/>
-                <a:uFillTx/>
-                <a:latin typeface="Arial"/>
-              </a:rPr>
-              <a:t>Сын Ивана Красного и княгини Александры Владимировны</a:t>
-            </a:r>
-            <a:endParaRPr b="0" lang="ru-RU" sz="3200" strike="noStrike" u="none">
-              <a:solidFill>
-                <a:srgbClr val="000000"/>
-              </a:solidFill>
-              <a:effectLst/>
-              <a:uFillTx/>
-              <a:latin typeface="Arial"/>
+              <a:rPr b="0" lang="ru-RU" sz="2800" strike="noStrike" u="none">
+                <a:solidFill>
+                  <a:srgbClr val="000000"/>
+                </a:solidFill>
+                <a:effectLst/>
+                <a:uFillTx/>
+                <a:latin typeface="Noto Sans"/>
+              </a:rPr>
+              <a:t>Сын Ивана II Красного и княгини Александры Владимировны</a:t>
+            </a:r>
+            <a:endParaRPr b="0" lang="ru-RU" sz="2800" strike="noStrike" u="none">
+              <a:solidFill>
+                <a:srgbClr val="000000"/>
+              </a:solidFill>
+              <a:effectLst/>
+              <a:uFillTx/>
+              <a:latin typeface="Noto Sans"/>
+            </a:endParaRPr>
+          </a:p>
+          <a:p>
+            <a:pPr marL="432000" indent="-324000">
+              <a:lnSpc>
+                <a:spcPct val="100000"/>
+              </a:lnSpc>
+              <a:spcBef>
+                <a:spcPts val="1417"/>
+              </a:spcBef>
+              <a:buClr>
+                <a:srgbClr val="000000"/>
+              </a:buClr>
+              <a:buSzPct val="45000"/>
+              <a:buFont typeface="Wingdings" charset="2"/>
+              <a:buChar char=""/>
+            </a:pPr>
+            <a:r>
+              <a:rPr b="0" lang="ru-RU" sz="2800" strike="noStrike" u="none">
+                <a:solidFill>
+                  <a:srgbClr val="000000"/>
+                </a:solidFill>
+                <a:effectLst/>
+                <a:uFillTx/>
+                <a:latin typeface="Noto Sans"/>
+              </a:rPr>
+              <a:t>Опекуном Дмитрия был митрополит Алексий</a:t>
+            </a:r>
+            <a:endParaRPr b="0" lang="ru-RU" sz="2800" strike="noStrike" u="none">
+              <a:solidFill>
+                <a:srgbClr val="000000"/>
+              </a:solidFill>
+              <a:effectLst/>
+              <a:uFillTx/>
+              <a:latin typeface="Noto Sans"/>
             </a:endParaRPr>
           </a:p>
         </p:txBody>
       </p:sp>
       <p:pic>
         <p:nvPicPr>
-          <p:cNvPr id="15" name="" descr=""/>
+          <p:cNvPr id="16" name="" descr=""/>
           <p:cNvPicPr/>
           <p:nvPr/>
         </p:nvPicPr>
@@ -1197,8 +1517,8 @@
         </p:blipFill>
         <p:spPr>
           <a:xfrm>
-            <a:off x="6864840" y="1326600"/>
-            <a:ext cx="2710800" cy="3600000"/>
+            <a:off x="7020000" y="1326600"/>
+            <a:ext cx="2710440" cy="3599640"/>
           </a:xfrm>
           <a:prstGeom prst="rect">
             <a:avLst/>
@@ -1241,7 +1561,7 @@
       </p:grpSpPr>
       <p:sp>
         <p:nvSpPr>
-          <p:cNvPr id="16" name="PlaceHolder 1"/>
+          <p:cNvPr id="17" name="PlaceHolder 1"/>
           <p:cNvSpPr>
             <a:spLocks noGrp="1"/>
           </p:cNvSpPr>
@@ -1251,8 +1571,8 @@
         </p:nvSpPr>
         <p:spPr>
           <a:xfrm>
-            <a:off x="504000" y="226080"/>
-            <a:ext cx="9071640" cy="946440"/>
+            <a:off x="504000" y="225720"/>
+            <a:ext cx="9071280" cy="946800"/>
           </a:xfrm>
           <a:prstGeom prst="rect">
             <a:avLst/>
@@ -1268,7 +1588,13 @@
           </a:bodyPr>
           <a:p>
             <a:pPr indent="0" algn="ctr">
+              <a:lnSpc>
+                <a:spcPct val="100000"/>
+              </a:lnSpc>
               <a:buNone/>
+              <a:tabLst>
+                <a:tab algn="l" pos="0"/>
+              </a:tabLst>
             </a:pPr>
             <a:r>
               <a:rPr b="0" lang="ru-RU" sz="4400" strike="noStrike" u="none">
@@ -1277,7 +1603,7 @@
                 </a:solidFill>
                 <a:effectLst/>
                 <a:uFillTx/>
-                <a:latin typeface="Arial"/>
+                <a:latin typeface="Noto Sans"/>
               </a:rPr>
               <a:t>Политика Дмитрия Донского</a:t>
             </a:r>
@@ -1287,14 +1613,14 @@
               </a:solidFill>
               <a:effectLst/>
               <a:uFillTx/>
-              <a:latin typeface="Arial"/>
+              <a:latin typeface="Noto Sans"/>
             </a:endParaRPr>
           </a:p>
         </p:txBody>
       </p:sp>
       <p:sp>
         <p:nvSpPr>
-          <p:cNvPr id="17" name="PlaceHolder 2"/>
+          <p:cNvPr id="18" name="PlaceHolder 2"/>
           <p:cNvSpPr>
             <a:spLocks noGrp="1"/>
           </p:cNvSpPr>
@@ -1305,7 +1631,7 @@
         <p:spPr>
           <a:xfrm>
             <a:off x="504000" y="1326600"/>
-            <a:ext cx="9071640" cy="3288240"/>
+            <a:ext cx="5129280" cy="4073400"/>
           </a:xfrm>
           <a:prstGeom prst="rect">
             <a:avLst/>
@@ -1316,27 +1642,280 @@
           </a:ln>
         </p:spPr>
         <p:txBody>
-          <a:bodyPr lIns="0" rIns="0" tIns="0" bIns="0" anchor="t">
-            <a:normAutofit/>
+          <a:bodyPr lIns="0" rIns="0" tIns="0" bIns="0" anchor="ctr">
+            <a:normAutofit lnSpcReduction="9999"/>
           </a:bodyPr>
           <a:p>
-            <a:pPr indent="0">
+            <a:pPr marL="432000" indent="-324000">
+              <a:lnSpc>
+                <a:spcPct val="100000"/>
+              </a:lnSpc>
               <a:spcBef>
                 <a:spcPts val="1417"/>
               </a:spcBef>
-              <a:buNone/>
-            </a:pPr>
-            <a:endParaRPr b="0" lang="ru-RU" sz="3200" strike="noStrike" u="none">
-              <a:solidFill>
-                <a:srgbClr val="000000"/>
-              </a:solidFill>
-              <a:effectLst/>
-              <a:uFillTx/>
-              <a:latin typeface="Arial"/>
+              <a:buClr>
+                <a:srgbClr val="000000"/>
+              </a:buClr>
+              <a:buSzPct val="45000"/>
+              <a:buFont typeface="Wingdings" charset="2"/>
+              <a:buChar char=""/>
+            </a:pPr>
+            <a:r>
+              <a:rPr b="0" lang="ru-RU" sz="2800" strike="noStrike" u="none">
+                <a:solidFill>
+                  <a:srgbClr val="000000"/>
+                </a:solidFill>
+                <a:effectLst/>
+                <a:uFillTx/>
+                <a:latin typeface="Noto Sans"/>
+              </a:rPr>
+              <a:t>Внутренняя политика</a:t>
+            </a:r>
+            <a:endParaRPr b="0" lang="ru-RU" sz="2800" strike="noStrike" u="none">
+              <a:solidFill>
+                <a:srgbClr val="000000"/>
+              </a:solidFill>
+              <a:effectLst/>
+              <a:uFillTx/>
+              <a:latin typeface="Noto Sans"/>
+            </a:endParaRPr>
+          </a:p>
+          <a:p>
+            <a:pPr lvl="1" marL="864000" indent="-324000">
+              <a:lnSpc>
+                <a:spcPct val="100000"/>
+              </a:lnSpc>
+              <a:spcBef>
+                <a:spcPts val="1134"/>
+              </a:spcBef>
+              <a:buClr>
+                <a:srgbClr val="000000"/>
+              </a:buClr>
+              <a:buSzPct val="75000"/>
+              <a:buFont typeface="Symbol" charset="2"/>
+              <a:buChar char=""/>
+            </a:pPr>
+            <a:r>
+              <a:rPr b="0" lang="ru-RU" sz="2600" strike="noStrike" u="none">
+                <a:solidFill>
+                  <a:srgbClr val="000000"/>
+                </a:solidFill>
+                <a:effectLst/>
+                <a:uFillTx/>
+                <a:latin typeface="Noto Sans"/>
+              </a:rPr>
+              <a:t>Укрепление Москвы</a:t>
+            </a:r>
+            <a:endParaRPr b="0" lang="ru-RU" sz="2600" strike="noStrike" u="none">
+              <a:solidFill>
+                <a:srgbClr val="000000"/>
+              </a:solidFill>
+              <a:effectLst/>
+              <a:uFillTx/>
+              <a:latin typeface="Noto Sans"/>
+            </a:endParaRPr>
+          </a:p>
+          <a:p>
+            <a:pPr lvl="1" marL="864000" indent="-324000">
+              <a:lnSpc>
+                <a:spcPct val="100000"/>
+              </a:lnSpc>
+              <a:spcBef>
+                <a:spcPts val="1134"/>
+              </a:spcBef>
+              <a:buClr>
+                <a:srgbClr val="000000"/>
+              </a:buClr>
+              <a:buSzPct val="75000"/>
+              <a:buFont typeface="Symbol" charset="2"/>
+              <a:buChar char=""/>
+            </a:pPr>
+            <a:r>
+              <a:rPr b="0" lang="ru-RU" sz="2600" strike="noStrike" u="none">
+                <a:solidFill>
+                  <a:srgbClr val="000000"/>
+                </a:solidFill>
+                <a:effectLst/>
+                <a:uFillTx/>
+                <a:latin typeface="Noto Sans"/>
+              </a:rPr>
+              <a:t>Прислушивался к боярам</a:t>
+            </a:r>
+            <a:endParaRPr b="0" lang="ru-RU" sz="2600" strike="noStrike" u="none">
+              <a:solidFill>
+                <a:srgbClr val="000000"/>
+              </a:solidFill>
+              <a:effectLst/>
+              <a:uFillTx/>
+              <a:latin typeface="Noto Sans"/>
+            </a:endParaRPr>
+          </a:p>
+          <a:p>
+            <a:pPr marL="432000" indent="-324000">
+              <a:lnSpc>
+                <a:spcPct val="100000"/>
+              </a:lnSpc>
+              <a:spcBef>
+                <a:spcPts val="1417"/>
+              </a:spcBef>
+              <a:buClr>
+                <a:srgbClr val="000000"/>
+              </a:buClr>
+              <a:buSzPct val="45000"/>
+              <a:buFont typeface="Wingdings" charset="2"/>
+              <a:buChar char=""/>
+            </a:pPr>
+            <a:r>
+              <a:rPr b="0" lang="ru-RU" sz="2800" strike="noStrike" u="none">
+                <a:solidFill>
+                  <a:srgbClr val="000000"/>
+                </a:solidFill>
+                <a:effectLst/>
+                <a:uFillTx/>
+                <a:latin typeface="Noto Sans"/>
+              </a:rPr>
+              <a:t>Внешняя политика</a:t>
+            </a:r>
+            <a:endParaRPr b="0" lang="ru-RU" sz="2800" strike="noStrike" u="none">
+              <a:solidFill>
+                <a:srgbClr val="000000"/>
+              </a:solidFill>
+              <a:effectLst/>
+              <a:uFillTx/>
+              <a:latin typeface="Noto Sans"/>
+            </a:endParaRPr>
+          </a:p>
+          <a:p>
+            <a:pPr lvl="1" marL="864000" indent="-324000">
+              <a:lnSpc>
+                <a:spcPct val="100000"/>
+              </a:lnSpc>
+              <a:spcBef>
+                <a:spcPts val="1134"/>
+              </a:spcBef>
+              <a:buClr>
+                <a:srgbClr val="000000"/>
+              </a:buClr>
+              <a:buSzPct val="75000"/>
+              <a:buFont typeface="Symbol" charset="2"/>
+              <a:buChar char=""/>
+            </a:pPr>
+            <a:r>
+              <a:rPr b="0" lang="ru-RU" sz="2600" strike="noStrike" u="none">
+                <a:solidFill>
+                  <a:srgbClr val="000000"/>
+                </a:solidFill>
+                <a:effectLst/>
+                <a:uFillTx/>
+                <a:latin typeface="Noto Sans"/>
+              </a:rPr>
+              <a:t>Присоединил многие княжества</a:t>
+            </a:r>
+            <a:endParaRPr b="0" lang="ru-RU" sz="2600" strike="noStrike" u="none">
+              <a:solidFill>
+                <a:srgbClr val="000000"/>
+              </a:solidFill>
+              <a:effectLst/>
+              <a:uFillTx/>
+              <a:latin typeface="Noto Sans"/>
+            </a:endParaRPr>
+          </a:p>
+          <a:p>
+            <a:pPr lvl="1" marL="864000" indent="-324000">
+              <a:lnSpc>
+                <a:spcPct val="100000"/>
+              </a:lnSpc>
+              <a:spcBef>
+                <a:spcPts val="1134"/>
+              </a:spcBef>
+              <a:buClr>
+                <a:srgbClr val="000000"/>
+              </a:buClr>
+              <a:buSzPct val="75000"/>
+              <a:buFont typeface="Symbol" charset="2"/>
+              <a:buChar char=""/>
+            </a:pPr>
+            <a:r>
+              <a:rPr b="0" lang="ru-RU" sz="2600" strike="noStrike" u="none">
+                <a:solidFill>
+                  <a:srgbClr val="000000"/>
+                </a:solidFill>
+                <a:effectLst/>
+                <a:uFillTx/>
+                <a:latin typeface="Noto Sans"/>
+              </a:rPr>
+              <a:t>Победил Волжских Булгар</a:t>
+            </a:r>
+            <a:endParaRPr b="0" lang="ru-RU" sz="2600" strike="noStrike" u="none">
+              <a:solidFill>
+                <a:srgbClr val="000000"/>
+              </a:solidFill>
+              <a:effectLst/>
+              <a:uFillTx/>
+              <a:latin typeface="Noto Sans"/>
+            </a:endParaRPr>
+          </a:p>
+          <a:p>
+            <a:pPr lvl="1" marL="864000" indent="-324000">
+              <a:lnSpc>
+                <a:spcPct val="100000"/>
+              </a:lnSpc>
+              <a:spcBef>
+                <a:spcPts val="1134"/>
+              </a:spcBef>
+              <a:buClr>
+                <a:srgbClr val="000000"/>
+              </a:buClr>
+              <a:buSzPct val="75000"/>
+              <a:buFont typeface="Symbol" charset="2"/>
+              <a:buChar char=""/>
+            </a:pPr>
+            <a:r>
+              <a:rPr b="0" lang="ru-RU" sz="2600" strike="noStrike" u="none">
+                <a:solidFill>
+                  <a:srgbClr val="000000"/>
+                </a:solidFill>
+                <a:effectLst/>
+                <a:uFillTx/>
+                <a:latin typeface="Noto Sans"/>
+              </a:rPr>
+              <a:t>Подчинил Тверь</a:t>
+            </a:r>
+            <a:endParaRPr b="0" lang="ru-RU" sz="2600" strike="noStrike" u="none">
+              <a:solidFill>
+                <a:srgbClr val="000000"/>
+              </a:solidFill>
+              <a:effectLst/>
+              <a:uFillTx/>
+              <a:latin typeface="Noto Sans"/>
             </a:endParaRPr>
           </a:p>
         </p:txBody>
       </p:sp>
+      <p:pic>
+        <p:nvPicPr>
+          <p:cNvPr id="19" name="" descr=""/>
+          <p:cNvPicPr/>
+          <p:nvPr/>
+        </p:nvPicPr>
+        <p:blipFill>
+          <a:blip r:embed="rId1"/>
+          <a:stretch/>
+        </p:blipFill>
+        <p:spPr>
+          <a:xfrm>
+            <a:off x="5633280" y="1440000"/>
+            <a:ext cx="4110120" cy="3780000"/>
+          </a:xfrm>
+          <a:prstGeom prst="rect">
+            <a:avLst/>
+          </a:prstGeom>
+          <a:noFill/>
+          <a:ln w="0">
+            <a:noFill/>
+          </a:ln>
+        </p:spPr>
+      </p:pic>
     </p:spTree>
   </p:cSld>
   <mc:AlternateContent>
@@ -1369,7 +1948,7 @@
       </p:grpSpPr>
       <p:sp>
         <p:nvSpPr>
-          <p:cNvPr id="18" name="PlaceHolder 1"/>
+          <p:cNvPr id="20" name="PlaceHolder 1"/>
           <p:cNvSpPr>
             <a:spLocks noGrp="1"/>
           </p:cNvSpPr>
@@ -1379,8 +1958,8 @@
         </p:nvSpPr>
         <p:spPr>
           <a:xfrm>
-            <a:off x="504000" y="226080"/>
-            <a:ext cx="9071640" cy="946440"/>
+            <a:off x="504000" y="225720"/>
+            <a:ext cx="9071280" cy="946800"/>
           </a:xfrm>
           <a:prstGeom prst="rect">
             <a:avLst/>
@@ -1396,7 +1975,13 @@
           </a:bodyPr>
           <a:p>
             <a:pPr indent="0" algn="ctr">
+              <a:lnSpc>
+                <a:spcPct val="100000"/>
+              </a:lnSpc>
               <a:buNone/>
+              <a:tabLst>
+                <a:tab algn="l" pos="0"/>
+              </a:tabLst>
             </a:pPr>
             <a:r>
               <a:rPr b="0" lang="ru-RU" sz="4400" strike="noStrike" u="none">
@@ -1405,7 +1990,7 @@
                 </a:solidFill>
                 <a:effectLst/>
                 <a:uFillTx/>
-                <a:latin typeface="Arial"/>
+                <a:latin typeface="Noto Sans"/>
               </a:rPr>
               <a:t>Отношения с церковью</a:t>
             </a:r>
@@ -1415,14 +2000,14 @@
               </a:solidFill>
               <a:effectLst/>
               <a:uFillTx/>
-              <a:latin typeface="Arial"/>
+              <a:latin typeface="Noto Sans"/>
             </a:endParaRPr>
           </a:p>
         </p:txBody>
       </p:sp>
       <p:sp>
         <p:nvSpPr>
-          <p:cNvPr id="19" name="PlaceHolder 2"/>
+          <p:cNvPr id="21" name="PlaceHolder 2"/>
           <p:cNvSpPr>
             <a:spLocks noGrp="1"/>
           </p:cNvSpPr>
@@ -1432,8 +2017,8 @@
         </p:nvSpPr>
         <p:spPr>
           <a:xfrm>
-            <a:off x="504000" y="1326600"/>
-            <a:ext cx="9071640" cy="3288240"/>
+            <a:off x="504000" y="1260000"/>
+            <a:ext cx="5976000" cy="3780000"/>
           </a:xfrm>
           <a:prstGeom prst="rect">
             <a:avLst/>
@@ -1444,27 +2029,132 @@
           </a:ln>
         </p:spPr>
         <p:txBody>
-          <a:bodyPr lIns="0" rIns="0" tIns="0" bIns="0" anchor="t">
+          <a:bodyPr lIns="0" rIns="0" tIns="0" bIns="0" anchor="ctr">
             <a:normAutofit/>
           </a:bodyPr>
           <a:p>
-            <a:pPr indent="0">
+            <a:pPr marL="432000" indent="-324000">
               <a:spcBef>
                 <a:spcPts val="1417"/>
               </a:spcBef>
-              <a:buNone/>
-            </a:pPr>
-            <a:endParaRPr b="0" lang="ru-RU" sz="3200" strike="noStrike" u="none">
-              <a:solidFill>
-                <a:srgbClr val="000000"/>
-              </a:solidFill>
-              <a:effectLst/>
-              <a:uFillTx/>
-              <a:latin typeface="Arial"/>
+              <a:buClr>
+                <a:srgbClr val="000000"/>
+              </a:buClr>
+              <a:buSzPct val="45000"/>
+              <a:buFont typeface="Wingdings" charset="2"/>
+              <a:buChar char=""/>
+            </a:pPr>
+            <a:r>
+              <a:rPr b="0" lang="ru-RU" sz="2800" strike="noStrike" u="none">
+                <a:solidFill>
+                  <a:srgbClr val="000000"/>
+                </a:solidFill>
+                <a:effectLst/>
+                <a:uFillTx/>
+                <a:latin typeface="Noto Sans"/>
+              </a:rPr>
+              <a:t>Донской был глубоко верующим</a:t>
+            </a:r>
+            <a:endParaRPr b="0" lang="ru-RU" sz="2800" strike="noStrike" u="none">
+              <a:solidFill>
+                <a:srgbClr val="000000"/>
+              </a:solidFill>
+              <a:effectLst/>
+              <a:uFillTx/>
+              <a:latin typeface="Noto Sans"/>
+            </a:endParaRPr>
+          </a:p>
+          <a:p>
+            <a:pPr marL="432000" indent="-324000">
+              <a:spcBef>
+                <a:spcPts val="1417"/>
+              </a:spcBef>
+              <a:buClr>
+                <a:srgbClr val="000000"/>
+              </a:buClr>
+              <a:buSzPct val="45000"/>
+              <a:buFont typeface="Wingdings" charset="2"/>
+              <a:buChar char=""/>
+            </a:pPr>
+            <a:r>
+              <a:rPr b="0" lang="ru-RU" sz="2800" strike="noStrike" u="none">
+                <a:solidFill>
+                  <a:srgbClr val="000000"/>
+                </a:solidFill>
+                <a:effectLst/>
+                <a:uFillTx/>
+                <a:latin typeface="Noto Sans"/>
+              </a:rPr>
+              <a:t>Открыты монастыри в Москве, Серпухове, Коломне</a:t>
+            </a:r>
+            <a:endParaRPr b="0" lang="ru-RU" sz="2800" strike="noStrike" u="none">
+              <a:solidFill>
+                <a:srgbClr val="000000"/>
+              </a:solidFill>
+              <a:effectLst/>
+              <a:uFillTx/>
+              <a:latin typeface="Noto Sans"/>
+            </a:endParaRPr>
+          </a:p>
+          <a:p>
+            <a:pPr marL="432000" indent="-324000">
+              <a:spcBef>
+                <a:spcPts val="1417"/>
+              </a:spcBef>
+              <a:buClr>
+                <a:srgbClr val="000000"/>
+              </a:buClr>
+              <a:buSzPct val="45000"/>
+              <a:buFont typeface="Wingdings" charset="2"/>
+              <a:buChar char=""/>
+            </a:pPr>
+            <a:r>
+              <a:rPr b="0" lang="ru-RU" sz="2800" strike="noStrike" u="none">
+                <a:solidFill>
+                  <a:srgbClr val="000000"/>
+                </a:solidFill>
+                <a:effectLst/>
+                <a:uFillTx/>
+                <a:latin typeface="Noto Sans"/>
+              </a:rPr>
+              <a:t>Поддержка храмов и святых обителей</a:t>
+            </a:r>
+            <a:endParaRPr b="0" lang="ru-RU" sz="2800" strike="noStrike" u="none">
+              <a:solidFill>
+                <a:srgbClr val="000000"/>
+              </a:solidFill>
+              <a:effectLst/>
+              <a:uFillTx/>
+              <a:latin typeface="Noto Sans"/>
             </a:endParaRPr>
           </a:p>
         </p:txBody>
       </p:sp>
+      <p:pic>
+        <p:nvPicPr>
+          <p:cNvPr id="22" name="" descr=""/>
+          <p:cNvPicPr/>
+          <p:nvPr/>
+        </p:nvPicPr>
+        <p:blipFill>
+          <a:blip r:embed="rId1"/>
+          <a:srcRect l="0" t="0" r="0" b="10001"/>
+          <a:stretch/>
+        </p:blipFill>
+        <p:spPr>
+          <a:xfrm>
+            <a:off x="6660000" y="1440000"/>
+            <a:ext cx="2998800" cy="3600000"/>
+          </a:xfrm>
+          <a:prstGeom prst="rect">
+            <a:avLst/>
+          </a:prstGeom>
+          <a:noFill/>
+          <a:ln w="0">
+            <a:noFill/>
+          </a:ln>
+        </p:spPr>
+      </p:pic>
     </p:spTree>
   </p:cSld>
   <mc:AlternateContent>
@@ -1497,7 +2187,7 @@
       </p:grpSpPr>
       <p:sp>
         <p:nvSpPr>
-          <p:cNvPr id="20" name="PlaceHolder 1"/>
+          <p:cNvPr id="23" name="PlaceHolder 1"/>
           <p:cNvSpPr>
             <a:spLocks noGrp="1"/>
           </p:cNvSpPr>
@@ -1507,8 +2197,8 @@
         </p:nvSpPr>
         <p:spPr>
           <a:xfrm>
-            <a:off x="504000" y="74160"/>
-            <a:ext cx="9071640" cy="1250280"/>
+            <a:off x="504000" y="73800"/>
+            <a:ext cx="9071280" cy="1250640"/>
           </a:xfrm>
           <a:prstGeom prst="rect">
             <a:avLst/>
@@ -1524,7 +2214,13 @@
           </a:bodyPr>
           <a:p>
             <a:pPr indent="0" algn="ctr">
+              <a:lnSpc>
+                <a:spcPct val="100000"/>
+              </a:lnSpc>
               <a:buNone/>
+              <a:tabLst>
+                <a:tab algn="l" pos="0"/>
+              </a:tabLst>
             </a:pPr>
             <a:r>
               <a:rPr b="0" lang="ru-RU" sz="4400" strike="noStrike" u="none">
@@ -1535,7 +2231,7 @@
                 <a:uFillTx/>
                 <a:latin typeface="Arial"/>
               </a:rPr>
-              <a:t>Взаимоотношения с Золотой Ордой</a:t>
+              <a:t>Война с Золотой Ордой</a:t>
             </a:r>
             <a:endParaRPr b="0" lang="ru-RU" sz="4400" strike="noStrike" u="none">
               <a:solidFill>
@@ -1550,7 +2246,7 @@
       </p:sp>
       <p:sp>
         <p:nvSpPr>
-          <p:cNvPr id="21" name="PlaceHolder 2"/>
+          <p:cNvPr id="24" name="PlaceHolder 2"/>
           <p:cNvSpPr>
             <a:spLocks noGrp="1"/>
           </p:cNvSpPr>
@@ -1561,7 +2257,7 @@
         <p:spPr>
           <a:xfrm>
             <a:off x="504000" y="1326600"/>
-            <a:ext cx="9071640" cy="3288240"/>
+            <a:ext cx="5076000" cy="4073400"/>
           </a:xfrm>
           <a:prstGeom prst="rect">
             <a:avLst/>
@@ -1572,17 +2268,97 @@
           </a:ln>
         </p:spPr>
         <p:txBody>
-          <a:bodyPr lIns="0" rIns="0" tIns="0" bIns="0" anchor="t">
+          <a:bodyPr lIns="0" rIns="0" tIns="0" bIns="0" anchor="ctr">
             <a:normAutofit/>
           </a:bodyPr>
           <a:p>
-            <a:pPr indent="0">
+            <a:pPr marL="432000" indent="-324000">
               <a:spcBef>
                 <a:spcPts val="1417"/>
               </a:spcBef>
-              <a:buNone/>
-            </a:pPr>
-            <a:endParaRPr b="0" lang="ru-RU" sz="3200" strike="noStrike" u="none">
+              <a:buClr>
+                <a:srgbClr val="000000"/>
+              </a:buClr>
+              <a:buSzPct val="45000"/>
+              <a:buFont typeface="Wingdings" charset="2"/>
+              <a:buChar char=""/>
+            </a:pPr>
+            <a:r>
+              <a:rPr b="0" lang="ru-RU" sz="2800" strike="noStrike" u="none">
+                <a:solidFill>
+                  <a:srgbClr val="000000"/>
+                </a:solidFill>
+                <a:effectLst/>
+                <a:uFillTx/>
+                <a:latin typeface="Arial"/>
+              </a:rPr>
+              <a:t>В 1374 отказался платить дань</a:t>
+            </a:r>
+            <a:endParaRPr b="0" lang="ru-RU" sz="2800" strike="noStrike" u="none">
+              <a:solidFill>
+                <a:srgbClr val="000000"/>
+              </a:solidFill>
+              <a:effectLst/>
+              <a:uFillTx/>
+              <a:latin typeface="Arial"/>
+            </a:endParaRPr>
+          </a:p>
+          <a:p>
+            <a:pPr marL="432000" indent="-324000">
+              <a:spcBef>
+                <a:spcPts val="1417"/>
+              </a:spcBef>
+              <a:buClr>
+                <a:srgbClr val="000000"/>
+              </a:buClr>
+              <a:buSzPct val="45000"/>
+              <a:buFont typeface="Wingdings" charset="2"/>
+              <a:buChar char=""/>
+            </a:pPr>
+            <a:r>
+              <a:rPr b="0" lang="ru-RU" sz="2800" strike="noStrike" u="none">
+                <a:solidFill>
+                  <a:srgbClr val="000000"/>
+                </a:solidFill>
+                <a:effectLst/>
+                <a:uFillTx/>
+                <a:latin typeface="Arial"/>
+              </a:rPr>
+              <a:t>В 1378 году разгромил войско Мамая на реке Воже</a:t>
+            </a:r>
+            <a:endParaRPr b="0" lang="ru-RU" sz="2800" strike="noStrike" u="none">
+              <a:solidFill>
+                <a:srgbClr val="000000"/>
+              </a:solidFill>
+              <a:effectLst/>
+              <a:uFillTx/>
+              <a:latin typeface="Arial"/>
+            </a:endParaRPr>
+          </a:p>
+          <a:p>
+            <a:pPr marL="432000" indent="-324000">
+              <a:spcBef>
+                <a:spcPts val="1417"/>
+              </a:spcBef>
+              <a:buClr>
+                <a:srgbClr val="000000"/>
+              </a:buClr>
+              <a:buSzPct val="45000"/>
+              <a:buFont typeface="Wingdings" charset="2"/>
+              <a:buChar char=""/>
+            </a:pPr>
+            <a:r>
+              <a:rPr b="0" lang="ru-RU" sz="2800" strike="noStrike" u="none">
+                <a:solidFill>
+                  <a:srgbClr val="000000"/>
+                </a:solidFill>
+                <a:effectLst/>
+                <a:uFillTx/>
+                <a:latin typeface="Arial"/>
+              </a:rPr>
+              <a:t>В 1380 году разгромил войска татар на реке Дон в Куликовской битве</a:t>
+            </a:r>
+            <a:endParaRPr b="0" lang="ru-RU" sz="2800" strike="noStrike" u="none">
               <a:solidFill>
                 <a:srgbClr val="000000"/>
               </a:solidFill>
@@ -1593,6 +2369,31 @@
           </a:p>
         </p:txBody>
       </p:sp>
+      <p:pic>
+        <p:nvPicPr>
+          <p:cNvPr id="25" name="" descr=""/>
+          <p:cNvPicPr/>
+          <p:nvPr/>
+        </p:nvPicPr>
+        <p:blipFill>
+          <a:blip r:embed="rId1"/>
+          <a:srcRect l="7866" t="0" r="21260" b="0"/>
+          <a:stretch/>
+        </p:blipFill>
+        <p:spPr>
+          <a:xfrm>
+            <a:off x="5850000" y="1800000"/>
+            <a:ext cx="3870000" cy="3240000"/>
+          </a:xfrm>
+          <a:prstGeom prst="rect">
+            <a:avLst/>
+          </a:prstGeom>
+          <a:noFill/>
+          <a:ln w="0">
+            <a:noFill/>
+          </a:ln>
+        </p:spPr>
+      </p:pic>
     </p:spTree>
   </p:cSld>
   <mc:AlternateContent>
@@ -1625,7 +2426,7 @@
       </p:grpSpPr>
       <p:sp>
         <p:nvSpPr>
-          <p:cNvPr id="22" name="PlaceHolder 1"/>
+          <p:cNvPr id="26" name="PlaceHolder 1"/>
           <p:cNvSpPr>
             <a:spLocks noGrp="1"/>
           </p:cNvSpPr>
@@ -1635,8 +2436,8 @@
         </p:nvSpPr>
         <p:spPr>
           <a:xfrm>
-            <a:off x="504000" y="226080"/>
-            <a:ext cx="9071640" cy="946440"/>
+            <a:off x="504000" y="73800"/>
+            <a:ext cx="9071280" cy="1250640"/>
           </a:xfrm>
           <a:prstGeom prst="rect">
             <a:avLst/>
@@ -1652,7 +2453,13 @@
           </a:bodyPr>
           <a:p>
             <a:pPr indent="0" algn="ctr">
+              <a:lnSpc>
+                <a:spcPct val="100000"/>
+              </a:lnSpc>
               <a:buNone/>
+              <a:tabLst>
+                <a:tab algn="l" pos="0"/>
+              </a:tabLst>
             </a:pPr>
             <a:r>
               <a:rPr b="0" lang="ru-RU" sz="4400" strike="noStrike" u="none">
@@ -1663,7 +2470,7 @@
                 <a:uFillTx/>
                 <a:latin typeface="Arial"/>
               </a:rPr>
-              <a:t>Историческое значение</a:t>
+              <a:t>Война с Золотой Ордой</a:t>
             </a:r>
             <a:endParaRPr b="0" lang="ru-RU" sz="4400" strike="noStrike" u="none">
               <a:solidFill>
@@ -1678,7 +2485,7 @@
       </p:sp>
       <p:sp>
         <p:nvSpPr>
-          <p:cNvPr id="23" name="PlaceHolder 2"/>
+          <p:cNvPr id="27" name="PlaceHolder 2"/>
           <p:cNvSpPr>
             <a:spLocks noGrp="1"/>
           </p:cNvSpPr>
@@ -1689,7 +2496,7 @@
         <p:spPr>
           <a:xfrm>
             <a:off x="504000" y="1326600"/>
-            <a:ext cx="9071640" cy="3288240"/>
+            <a:ext cx="5076000" cy="4073400"/>
           </a:xfrm>
           <a:prstGeom prst="rect">
             <a:avLst/>
@@ -1700,17 +2507,97 @@
           </a:ln>
         </p:spPr>
         <p:txBody>
-          <a:bodyPr lIns="0" rIns="0" tIns="0" bIns="0" anchor="t">
+          <a:bodyPr lIns="0" rIns="0" tIns="0" bIns="0" anchor="ctr">
             <a:normAutofit/>
           </a:bodyPr>
           <a:p>
-            <a:pPr indent="0">
+            <a:pPr marL="432000" indent="-324000">
               <a:spcBef>
                 <a:spcPts val="1417"/>
               </a:spcBef>
-              <a:buNone/>
-            </a:pPr>
-            <a:endParaRPr b="0" lang="ru-RU" sz="3200" strike="noStrike" u="none">
+              <a:buClr>
+                <a:srgbClr val="000000"/>
+              </a:buClr>
+              <a:buSzPct val="45000"/>
+              <a:buFont typeface="Wingdings" charset="2"/>
+              <a:buChar char=""/>
+            </a:pPr>
+            <a:r>
+              <a:rPr b="0" lang="ru-RU" sz="2800" strike="noStrike" u="none">
+                <a:solidFill>
+                  <a:srgbClr val="000000"/>
+                </a:solidFill>
+                <a:effectLst/>
+                <a:uFillTx/>
+                <a:latin typeface="Arial"/>
+              </a:rPr>
+              <a:t>В 1374 отказался платить дань</a:t>
+            </a:r>
+            <a:endParaRPr b="0" lang="ru-RU" sz="2800" strike="noStrike" u="none">
+              <a:solidFill>
+                <a:srgbClr val="000000"/>
+              </a:solidFill>
+              <a:effectLst/>
+              <a:uFillTx/>
+              <a:latin typeface="Arial"/>
+            </a:endParaRPr>
+          </a:p>
+          <a:p>
+            <a:pPr marL="432000" indent="-324000">
+              <a:spcBef>
+                <a:spcPts val="1417"/>
+              </a:spcBef>
+              <a:buClr>
+                <a:srgbClr val="000000"/>
+              </a:buClr>
+              <a:buSzPct val="45000"/>
+              <a:buFont typeface="Wingdings" charset="2"/>
+              <a:buChar char=""/>
+            </a:pPr>
+            <a:r>
+              <a:rPr b="0" lang="ru-RU" sz="2800" strike="noStrike" u="none">
+                <a:solidFill>
+                  <a:srgbClr val="000000"/>
+                </a:solidFill>
+                <a:effectLst/>
+                <a:uFillTx/>
+                <a:latin typeface="Arial"/>
+              </a:rPr>
+              <a:t>В 1378 году разгромил войско Мамая на реке Воже</a:t>
+            </a:r>
+            <a:endParaRPr b="0" lang="ru-RU" sz="2800" strike="noStrike" u="none">
+              <a:solidFill>
+                <a:srgbClr val="000000"/>
+              </a:solidFill>
+              <a:effectLst/>
+              <a:uFillTx/>
+              <a:latin typeface="Arial"/>
+            </a:endParaRPr>
+          </a:p>
+          <a:p>
+            <a:pPr marL="432000" indent="-324000">
+              <a:spcBef>
+                <a:spcPts val="1417"/>
+              </a:spcBef>
+              <a:buClr>
+                <a:srgbClr val="000000"/>
+              </a:buClr>
+              <a:buSzPct val="45000"/>
+              <a:buFont typeface="Wingdings" charset="2"/>
+              <a:buChar char=""/>
+            </a:pPr>
+            <a:r>
+              <a:rPr b="0" lang="ru-RU" sz="2800" strike="noStrike" u="none">
+                <a:solidFill>
+                  <a:srgbClr val="000000"/>
+                </a:solidFill>
+                <a:effectLst/>
+                <a:uFillTx/>
+                <a:latin typeface="Arial"/>
+              </a:rPr>
+              <a:t>В 1380 году разгромил войска татар на реке Дон в Куликовской битве</a:t>
+            </a:r>
+            <a:endParaRPr b="0" lang="ru-RU" sz="2800" strike="noStrike" u="none">
               <a:solidFill>
                 <a:srgbClr val="000000"/>
               </a:solidFill>
@@ -1721,6 +2608,31 @@
           </a:p>
         </p:txBody>
       </p:sp>
+      <p:pic>
+        <p:nvPicPr>
+          <p:cNvPr id="28" name="" descr=""/>
+          <p:cNvPicPr/>
+          <p:nvPr/>
+        </p:nvPicPr>
+        <p:blipFill>
+          <a:blip r:embed="rId1"/>
+          <a:srcRect l="7866" t="0" r="21260" b="0"/>
+          <a:stretch/>
+        </p:blipFill>
+        <p:spPr>
+          <a:xfrm>
+            <a:off x="5850000" y="1800000"/>
+            <a:ext cx="3870000" cy="3240000"/>
+          </a:xfrm>
+          <a:prstGeom prst="rect">
+            <a:avLst/>
+          </a:prstGeom>
+          <a:noFill/>
+          <a:ln w="0">
+            <a:noFill/>
+          </a:ln>
+        </p:spPr>
+      </p:pic>
     </p:spTree>
   </p:cSld>
   <mc:AlternateContent>
@@ -1753,7 +2665,7 @@
       </p:grpSpPr>
       <p:sp>
         <p:nvSpPr>
-          <p:cNvPr id="24" name="PlaceHolder 1"/>
+          <p:cNvPr id="29" name="PlaceHolder 1"/>
           <p:cNvSpPr>
             <a:spLocks noGrp="1"/>
           </p:cNvSpPr>
@@ -1763,8 +2675,8 @@
         </p:nvSpPr>
         <p:spPr>
           <a:xfrm>
-            <a:off x="504000" y="226080"/>
-            <a:ext cx="9071640" cy="946440"/>
+            <a:off x="504000" y="73800"/>
+            <a:ext cx="9071280" cy="1250640"/>
           </a:xfrm>
           <a:prstGeom prst="rect">
             <a:avLst/>
@@ -1780,7 +2692,13 @@
           </a:bodyPr>
           <a:p>
             <a:pPr indent="0" algn="ctr">
+              <a:lnSpc>
+                <a:spcPct val="100000"/>
+              </a:lnSpc>
               <a:buNone/>
+              <a:tabLst>
+                <a:tab algn="l" pos="0"/>
+              </a:tabLst>
             </a:pPr>
             <a:r>
               <a:rPr b="0" lang="ru-RU" sz="4400" strike="noStrike" u="none">
@@ -1789,9 +2707,9 @@
                 </a:solidFill>
                 <a:effectLst/>
                 <a:uFillTx/>
-                <a:latin typeface="Arial"/>
-              </a:rPr>
-              <a:t>Источники</a:t>
+                <a:latin typeface="Noto Sans"/>
+              </a:rPr>
+              <a:t>Война с Золотой Ордой</a:t>
             </a:r>
             <a:endParaRPr b="0" lang="ru-RU" sz="4400" strike="noStrike" u="none">
               <a:solidFill>
@@ -1799,14 +2717,14 @@
               </a:solidFill>
               <a:effectLst/>
               <a:uFillTx/>
-              <a:latin typeface="Arial"/>
+              <a:latin typeface="Noto Sans"/>
             </a:endParaRPr>
           </a:p>
         </p:txBody>
       </p:sp>
       <p:sp>
         <p:nvSpPr>
-          <p:cNvPr id="25" name="PlaceHolder 2"/>
+          <p:cNvPr id="30" name="PlaceHolder 2"/>
           <p:cNvSpPr>
             <a:spLocks noGrp="1"/>
           </p:cNvSpPr>
@@ -1817,7 +2735,493 @@
         <p:spPr>
           <a:xfrm>
             <a:off x="504000" y="1326600"/>
-            <a:ext cx="9071640" cy="3288240"/>
+            <a:ext cx="5076000" cy="4073400"/>
+          </a:xfrm>
+          <a:prstGeom prst="rect">
+            <a:avLst/>
+          </a:prstGeom>
+          <a:noFill/>
+          <a:ln w="0">
+            <a:noFill/>
+          </a:ln>
+        </p:spPr>
+        <p:txBody>
+          <a:bodyPr lIns="0" rIns="0" tIns="0" bIns="0" anchor="ctr">
+            <a:normAutofit/>
+          </a:bodyPr>
+          <a:p>
+            <a:pPr marL="432000" indent="-324000">
+              <a:spcBef>
+                <a:spcPts val="1417"/>
+              </a:spcBef>
+              <a:buClr>
+                <a:srgbClr val="000000"/>
+              </a:buClr>
+              <a:buSzPct val="45000"/>
+              <a:buFont typeface="Wingdings" charset="2"/>
+              <a:buChar char=""/>
+            </a:pPr>
+            <a:r>
+              <a:rPr b="0" lang="ru-RU" sz="2800" strike="noStrike" u="none">
+                <a:solidFill>
+                  <a:srgbClr val="000000"/>
+                </a:solidFill>
+                <a:effectLst/>
+                <a:uFillTx/>
+                <a:latin typeface="Noto Sans"/>
+              </a:rPr>
+              <a:t>В 1374 отказался платить дань</a:t>
+            </a:r>
+            <a:endParaRPr b="0" lang="ru-RU" sz="2800" strike="noStrike" u="none">
+              <a:solidFill>
+                <a:srgbClr val="000000"/>
+              </a:solidFill>
+              <a:effectLst/>
+              <a:uFillTx/>
+              <a:latin typeface="Noto Sans"/>
+            </a:endParaRPr>
+          </a:p>
+          <a:p>
+            <a:pPr marL="432000" indent="-324000">
+              <a:spcBef>
+                <a:spcPts val="1417"/>
+              </a:spcBef>
+              <a:buClr>
+                <a:srgbClr val="000000"/>
+              </a:buClr>
+              <a:buSzPct val="45000"/>
+              <a:buFont typeface="Wingdings" charset="2"/>
+              <a:buChar char=""/>
+            </a:pPr>
+            <a:r>
+              <a:rPr b="0" lang="ru-RU" sz="2800" strike="noStrike" u="none">
+                <a:solidFill>
+                  <a:srgbClr val="000000"/>
+                </a:solidFill>
+                <a:effectLst/>
+                <a:uFillTx/>
+                <a:latin typeface="Noto Sans"/>
+              </a:rPr>
+              <a:t>В 1378 году разгромил войско Мамая на реке Воже</a:t>
+            </a:r>
+            <a:endParaRPr b="0" lang="ru-RU" sz="2800" strike="noStrike" u="none">
+              <a:solidFill>
+                <a:srgbClr val="000000"/>
+              </a:solidFill>
+              <a:effectLst/>
+              <a:uFillTx/>
+              <a:latin typeface="Noto Sans"/>
+            </a:endParaRPr>
+          </a:p>
+          <a:p>
+            <a:pPr marL="432000" indent="-324000">
+              <a:spcBef>
+                <a:spcPts val="1417"/>
+              </a:spcBef>
+              <a:buClr>
+                <a:srgbClr val="000000"/>
+              </a:buClr>
+              <a:buSzPct val="45000"/>
+              <a:buFont typeface="Wingdings" charset="2"/>
+              <a:buChar char=""/>
+            </a:pPr>
+            <a:r>
+              <a:rPr b="0" lang="ru-RU" sz="2800" strike="noStrike" u="none">
+                <a:solidFill>
+                  <a:srgbClr val="000000"/>
+                </a:solidFill>
+                <a:effectLst/>
+                <a:uFillTx/>
+                <a:latin typeface="Noto Sans"/>
+              </a:rPr>
+              <a:t>В 1380 году разгромил войска татар на реке Дон в Куликовской битве</a:t>
+            </a:r>
+            <a:endParaRPr b="0" lang="ru-RU" sz="2800" strike="noStrike" u="none">
+              <a:solidFill>
+                <a:srgbClr val="000000"/>
+              </a:solidFill>
+              <a:effectLst/>
+              <a:uFillTx/>
+              <a:latin typeface="Noto Sans"/>
+            </a:endParaRPr>
+          </a:p>
+        </p:txBody>
+      </p:sp>
+      <p:pic>
+        <p:nvPicPr>
+          <p:cNvPr id="31" name="" descr=""/>
+          <p:cNvPicPr/>
+          <p:nvPr/>
+        </p:nvPicPr>
+        <p:blipFill>
+          <a:blip r:embed="rId1"/>
+          <a:srcRect l="7866" t="0" r="21260" b="0"/>
+          <a:stretch/>
+        </p:blipFill>
+        <p:spPr>
+          <a:xfrm>
+            <a:off x="5850000" y="1800000"/>
+            <a:ext cx="3870000" cy="3240000"/>
+          </a:xfrm>
+          <a:prstGeom prst="rect">
+            <a:avLst/>
+          </a:prstGeom>
+          <a:noFill/>
+          <a:ln w="0">
+            <a:noFill/>
+          </a:ln>
+        </p:spPr>
+      </p:pic>
+    </p:spTree>
+  </p:cSld>
+  <mc:AlternateContent>
+    <mc:Choice Requires="p14">
+      <p:transition spd="slow" p14:dur="2000"/>
+    </mc:Choice>
+    <mc:Fallback>
+      <p:transition spd="slow"/>
+    </mc:Fallback>
+  </mc:AlternateContent>
+</p:sld>
+</file>
+
+<file path=ppt/slides/slide8.xml><?xml version="1.0" encoding="utf-8"?>
+<p:sld xmlns:a="http://schemas.openxmlformats.org/drawingml/2006/main" xmlns:p="http://schemas.openxmlformats.org/presentationml/2006/main" xmlns:r="http://schemas.openxmlformats.org/officeDocument/2006/relationships" xmlns:p14="http://schemas.microsoft.com/office/powerpoint/2010/main" xmlns:p15="http://schemas.microsoft.com/office/powerpoint/2012/main" xmlns:mc="http://schemas.openxmlformats.org/markup-compatibility/2006">
+  <p:cSld>
+    <p:spTree>
+      <p:nvGrpSpPr>
+        <p:cNvPr id="1" name=""/>
+        <p:cNvGrpSpPr/>
+        <p:nvPr/>
+      </p:nvGrpSpPr>
+      <p:grpSpPr>
+        <a:xfrm>
+          <a:off x="0" y="0"/>
+          <a:ext cx="0" cy="0"/>
+          <a:chOff x="0" y="0"/>
+          <a:chExt cx="0" cy="0"/>
+        </a:xfrm>
+      </p:grpSpPr>
+      <p:sp>
+        <p:nvSpPr>
+          <p:cNvPr id="32" name="PlaceHolder 1"/>
+          <p:cNvSpPr>
+            <a:spLocks noGrp="1"/>
+          </p:cNvSpPr>
+          <p:nvPr>
+            <p:ph type="title"/>
+          </p:nvPr>
+        </p:nvSpPr>
+        <p:spPr>
+          <a:xfrm>
+            <a:off x="504000" y="225720"/>
+            <a:ext cx="9071280" cy="946800"/>
+          </a:xfrm>
+          <a:prstGeom prst="rect">
+            <a:avLst/>
+          </a:prstGeom>
+          <a:noFill/>
+          <a:ln w="0">
+            <a:noFill/>
+          </a:ln>
+        </p:spPr>
+        <p:txBody>
+          <a:bodyPr lIns="0" rIns="0" tIns="0" bIns="0" anchor="ctr">
+            <a:spAutoFit/>
+          </a:bodyPr>
+          <a:p>
+            <a:pPr indent="0" algn="ctr">
+              <a:lnSpc>
+                <a:spcPct val="100000"/>
+              </a:lnSpc>
+              <a:buNone/>
+              <a:tabLst>
+                <a:tab algn="l" pos="0"/>
+              </a:tabLst>
+            </a:pPr>
+            <a:r>
+              <a:rPr b="0" lang="ru-RU" sz="4400" strike="noStrike" u="none">
+                <a:solidFill>
+                  <a:srgbClr val="000000"/>
+                </a:solidFill>
+                <a:effectLst/>
+                <a:uFillTx/>
+                <a:latin typeface="Noto Sans"/>
+              </a:rPr>
+              <a:t>Историческое значение</a:t>
+            </a:r>
+            <a:endParaRPr b="0" lang="ru-RU" sz="4400" strike="noStrike" u="none">
+              <a:solidFill>
+                <a:srgbClr val="000000"/>
+              </a:solidFill>
+              <a:effectLst/>
+              <a:uFillTx/>
+              <a:latin typeface="Noto Sans"/>
+            </a:endParaRPr>
+          </a:p>
+        </p:txBody>
+      </p:sp>
+      <p:sp>
+        <p:nvSpPr>
+          <p:cNvPr id="33" name="PlaceHolder 2"/>
+          <p:cNvSpPr>
+            <a:spLocks noGrp="1"/>
+          </p:cNvSpPr>
+          <p:nvPr>
+            <p:ph/>
+          </p:nvPr>
+        </p:nvSpPr>
+        <p:spPr>
+          <a:xfrm>
+            <a:off x="504000" y="1326600"/>
+            <a:ext cx="4536000" cy="3893400"/>
+          </a:xfrm>
+          <a:prstGeom prst="rect">
+            <a:avLst/>
+          </a:prstGeom>
+          <a:noFill/>
+          <a:ln w="0">
+            <a:noFill/>
+          </a:ln>
+        </p:spPr>
+        <p:txBody>
+          <a:bodyPr lIns="0" rIns="0" tIns="0" bIns="0" anchor="ctr">
+            <a:normAutofit/>
+          </a:bodyPr>
+          <a:p>
+            <a:pPr marL="432000" indent="-324000">
+              <a:lnSpc>
+                <a:spcPct val="100000"/>
+              </a:lnSpc>
+              <a:spcBef>
+                <a:spcPts val="1417"/>
+              </a:spcBef>
+              <a:buClr>
+                <a:srgbClr val="000000"/>
+              </a:buClr>
+              <a:buSzPct val="45000"/>
+              <a:buFont typeface="Wingdings" charset="2"/>
+              <a:buChar char=""/>
+            </a:pPr>
+            <a:r>
+              <a:rPr b="0" lang="ru-RU" sz="2800" strike="noStrike" u="none">
+                <a:solidFill>
+                  <a:srgbClr val="000000"/>
+                </a:solidFill>
+                <a:effectLst/>
+                <a:uFillTx/>
+                <a:latin typeface="Noto Sans"/>
+              </a:rPr>
+              <a:t>Объединение русских земель вокруг Москвы</a:t>
+            </a:r>
+            <a:endParaRPr b="0" lang="ru-RU" sz="2800" strike="noStrike" u="none">
+              <a:solidFill>
+                <a:srgbClr val="000000"/>
+              </a:solidFill>
+              <a:effectLst/>
+              <a:uFillTx/>
+              <a:latin typeface="Noto Sans"/>
+            </a:endParaRPr>
+          </a:p>
+          <a:p>
+            <a:pPr marL="432000" indent="-324000">
+              <a:lnSpc>
+                <a:spcPct val="100000"/>
+              </a:lnSpc>
+              <a:spcBef>
+                <a:spcPts val="1417"/>
+              </a:spcBef>
+              <a:buClr>
+                <a:srgbClr val="000000"/>
+              </a:buClr>
+              <a:buSzPct val="45000"/>
+              <a:buFont typeface="Wingdings" charset="2"/>
+              <a:buChar char=""/>
+            </a:pPr>
+            <a:r>
+              <a:rPr b="0" lang="ru-RU" sz="2800" strike="noStrike" u="none">
+                <a:solidFill>
+                  <a:srgbClr val="000000"/>
+                </a:solidFill>
+                <a:effectLst/>
+                <a:uFillTx/>
+                <a:latin typeface="Noto Sans"/>
+              </a:rPr>
+              <a:t>Победа над Золотой ордой</a:t>
+            </a:r>
+            <a:endParaRPr b="0" lang="ru-RU" sz="2800" strike="noStrike" u="none">
+              <a:solidFill>
+                <a:srgbClr val="000000"/>
+              </a:solidFill>
+              <a:effectLst/>
+              <a:uFillTx/>
+              <a:latin typeface="Noto Sans"/>
+            </a:endParaRPr>
+          </a:p>
+          <a:p>
+            <a:pPr marL="432000" indent="-324000">
+              <a:lnSpc>
+                <a:spcPct val="100000"/>
+              </a:lnSpc>
+              <a:spcBef>
+                <a:spcPts val="1417"/>
+              </a:spcBef>
+              <a:buClr>
+                <a:srgbClr val="000000"/>
+              </a:buClr>
+              <a:buSzPct val="45000"/>
+              <a:buFont typeface="Wingdings" charset="2"/>
+              <a:buChar char=""/>
+            </a:pPr>
+            <a:r>
+              <a:rPr b="0" lang="ru-RU" sz="2800" strike="noStrike" u="none">
+                <a:solidFill>
+                  <a:srgbClr val="000000"/>
+                </a:solidFill>
+                <a:effectLst/>
+                <a:uFillTx/>
+                <a:latin typeface="Noto Sans"/>
+              </a:rPr>
+              <a:t>Построены монастыри-крепости (Симонов и Андроников)</a:t>
+            </a:r>
+            <a:endParaRPr b="0" lang="ru-RU" sz="2800" strike="noStrike" u="none">
+              <a:solidFill>
+                <a:srgbClr val="000000"/>
+              </a:solidFill>
+              <a:effectLst/>
+              <a:uFillTx/>
+              <a:latin typeface="Noto Sans"/>
+            </a:endParaRPr>
+          </a:p>
+        </p:txBody>
+      </p:sp>
+      <p:pic>
+        <p:nvPicPr>
+          <p:cNvPr id="34" name="" descr=""/>
+          <p:cNvPicPr/>
+          <p:nvPr/>
+        </p:nvPicPr>
+        <p:blipFill>
+          <a:blip r:embed="rId1"/>
+          <a:stretch/>
+        </p:blipFill>
+        <p:spPr>
+          <a:xfrm>
+            <a:off x="5360400" y="1620000"/>
+            <a:ext cx="4539600" cy="3024000"/>
+          </a:xfrm>
+          <a:prstGeom prst="rect">
+            <a:avLst/>
+          </a:prstGeom>
+          <a:noFill/>
+          <a:ln w="0">
+            <a:noFill/>
+          </a:ln>
+        </p:spPr>
+      </p:pic>
+    </p:spTree>
+  </p:cSld>
+  <mc:AlternateContent>
+    <mc:Choice Requires="p14">
+      <p:transition spd="slow" p14:dur="2000"/>
+    </mc:Choice>
+    <mc:Fallback>
+      <p:transition spd="slow"/>
+    </mc:Fallback>
+  </mc:AlternateContent>
+</p:sld>
+</file>
+
+<file path=ppt/slides/slide9.xml><?xml version="1.0" encoding="utf-8"?>
+<p:sld xmlns:a="http://schemas.openxmlformats.org/drawingml/2006/main" xmlns:p="http://schemas.openxmlformats.org/presentationml/2006/main" xmlns:r="http://schemas.openxmlformats.org/officeDocument/2006/relationships" xmlns:p14="http://schemas.microsoft.com/office/powerpoint/2010/main" xmlns:p15="http://schemas.microsoft.com/office/powerpoint/2012/main" xmlns:mc="http://schemas.openxmlformats.org/markup-compatibility/2006">
+  <p:cSld>
+    <p:spTree>
+      <p:nvGrpSpPr>
+        <p:cNvPr id="1" name=""/>
+        <p:cNvGrpSpPr/>
+        <p:nvPr/>
+      </p:nvGrpSpPr>
+      <p:grpSpPr>
+        <a:xfrm>
+          <a:off x="0" y="0"/>
+          <a:ext cx="0" cy="0"/>
+          <a:chOff x="0" y="0"/>
+          <a:chExt cx="0" cy="0"/>
+        </a:xfrm>
+      </p:grpSpPr>
+      <p:sp>
+        <p:nvSpPr>
+          <p:cNvPr id="35" name="PlaceHolder 1"/>
+          <p:cNvSpPr>
+            <a:spLocks noGrp="1"/>
+          </p:cNvSpPr>
+          <p:nvPr>
+            <p:ph type="title"/>
+          </p:nvPr>
+        </p:nvSpPr>
+        <p:spPr>
+          <a:xfrm>
+            <a:off x="504000" y="225720"/>
+            <a:ext cx="9071280" cy="946800"/>
+          </a:xfrm>
+          <a:prstGeom prst="rect">
+            <a:avLst/>
+          </a:prstGeom>
+          <a:noFill/>
+          <a:ln w="0">
+            <a:noFill/>
+          </a:ln>
+        </p:spPr>
+        <p:txBody>
+          <a:bodyPr lIns="0" rIns="0" tIns="0" bIns="0" anchor="ctr">
+            <a:spAutoFit/>
+          </a:bodyPr>
+          <a:p>
+            <a:pPr indent="0" algn="ctr">
+              <a:lnSpc>
+                <a:spcPct val="100000"/>
+              </a:lnSpc>
+              <a:buNone/>
+              <a:tabLst>
+                <a:tab algn="l" pos="0"/>
+              </a:tabLst>
+            </a:pPr>
+            <a:r>
+              <a:rPr b="0" lang="ru-RU" sz="4400" strike="noStrike" u="none">
+                <a:solidFill>
+                  <a:srgbClr val="000000"/>
+                </a:solidFill>
+                <a:effectLst/>
+                <a:uFillTx/>
+                <a:latin typeface="Noto Sans"/>
+              </a:rPr>
+              <a:t>Источники</a:t>
+            </a:r>
+            <a:endParaRPr b="0" lang="ru-RU" sz="4400" strike="noStrike" u="none">
+              <a:solidFill>
+                <a:srgbClr val="000000"/>
+              </a:solidFill>
+              <a:effectLst/>
+              <a:uFillTx/>
+              <a:latin typeface="Noto Sans"/>
+            </a:endParaRPr>
+          </a:p>
+        </p:txBody>
+      </p:sp>
+      <p:sp>
+        <p:nvSpPr>
+          <p:cNvPr id="36" name="PlaceHolder 2"/>
+          <p:cNvSpPr>
+            <a:spLocks noGrp="1"/>
+          </p:cNvSpPr>
+          <p:nvPr>
+            <p:ph/>
+          </p:nvPr>
+        </p:nvSpPr>
+        <p:spPr>
+          <a:xfrm>
+            <a:off x="504000" y="1326600"/>
+            <a:ext cx="9071280" cy="3893400"/>
           </a:xfrm>
           <a:prstGeom prst="rect">
             <a:avLst/>
@@ -1832,13 +3236,164 @@
             <a:normAutofit/>
           </a:bodyPr>
           <a:p>
-            <a:pPr indent="0">
-              <a:spcBef>
-                <a:spcPts val="1417"/>
-              </a:spcBef>
-              <a:buNone/>
-            </a:pPr>
-            <a:endParaRPr b="0" lang="ru-RU" sz="3200" strike="noStrike" u="none">
+            <a:pPr marL="432000" indent="-324000">
+              <a:lnSpc>
+                <a:spcPct val="100000"/>
+              </a:lnSpc>
+              <a:spcBef>
+                <a:spcPts val="1191"/>
+              </a:spcBef>
+              <a:spcAft>
+                <a:spcPts val="992"/>
+              </a:spcAft>
+              <a:buClr>
+                <a:srgbClr val="000000"/>
+              </a:buClr>
+              <a:buSzPct val="45000"/>
+              <a:buFont typeface="Wingdings" charset="2"/>
+              <a:buChar char=""/>
+            </a:pPr>
+            <a:r>
+              <a:rPr b="0" lang="ru-RU" sz="2600" strike="noStrike" u="none">
+                <a:solidFill>
+                  <a:srgbClr val="000000"/>
+                </a:solidFill>
+                <a:effectLst/>
+                <a:uFillTx/>
+                <a:latin typeface="Noto Sans"/>
+                <a:hlinkClick r:id="rId1"/>
+              </a:rPr>
+              <a:t>https://www.culture.ru/persons/8514/dmitrii-donskoi</a:t>
+            </a:r>
+            <a:endParaRPr b="0" lang="ru-RU" sz="2600" strike="noStrike" u="none">
+              <a:solidFill>
+                <a:srgbClr val="000000"/>
+              </a:solidFill>
+              <a:effectLst/>
+              <a:uFillTx/>
+              <a:latin typeface="Arial"/>
+            </a:endParaRPr>
+          </a:p>
+          <a:p>
+            <a:pPr marL="432000" indent="-324000">
+              <a:lnSpc>
+                <a:spcPct val="100000"/>
+              </a:lnSpc>
+              <a:spcBef>
+                <a:spcPts val="1191"/>
+              </a:spcBef>
+              <a:spcAft>
+                <a:spcPts val="992"/>
+              </a:spcAft>
+              <a:buClr>
+                <a:srgbClr val="000000"/>
+              </a:buClr>
+              <a:buSzPct val="45000"/>
+              <a:buFont typeface="Wingdings" charset="2"/>
+              <a:buChar char=""/>
+            </a:pPr>
+            <a:r>
+              <a:rPr b="0" lang="ru-RU" sz="2600" strike="noStrike" u="none">
+                <a:solidFill>
+                  <a:srgbClr val="000000"/>
+                </a:solidFill>
+                <a:effectLst/>
+                <a:uFillTx/>
+                <a:latin typeface="Noto Sans"/>
+                <a:hlinkClick r:id="rId2"/>
+              </a:rPr>
+              <a:t>https://obrazovaka.ru/alpha/d/donskoj-dmitrij-donskoi-dmitri</a:t>
+            </a:r>
+            <a:endParaRPr b="0" lang="ru-RU" sz="2600" strike="noStrike" u="none">
+              <a:solidFill>
+                <a:srgbClr val="000000"/>
+              </a:solidFill>
+              <a:effectLst/>
+              <a:uFillTx/>
+              <a:latin typeface="Arial"/>
+            </a:endParaRPr>
+          </a:p>
+          <a:p>
+            <a:pPr marL="432000" indent="-324000">
+              <a:lnSpc>
+                <a:spcPct val="100000"/>
+              </a:lnSpc>
+              <a:spcBef>
+                <a:spcPts val="1191"/>
+              </a:spcBef>
+              <a:spcAft>
+                <a:spcPts val="992"/>
+              </a:spcAft>
+              <a:buClr>
+                <a:srgbClr val="000000"/>
+              </a:buClr>
+              <a:buSzPct val="45000"/>
+              <a:buFont typeface="Wingdings" charset="2"/>
+              <a:buChar char=""/>
+            </a:pPr>
+            <a:r>
+              <a:rPr b="0" lang="ru-RU" sz="2600" strike="noStrike" u="none">
+                <a:solidFill>
+                  <a:srgbClr val="000000"/>
+                </a:solidFill>
+                <a:effectLst/>
+                <a:uFillTx/>
+                <a:latin typeface="Noto Sans"/>
+                <a:hlinkClick r:id="rId3"/>
+              </a:rPr>
+              <a:t>https://historyrussia.org/sobytiya/12-oktyabrya-1350-goda-rodilsya-knyaz-dmitrij-donskoj.html</a:t>
+            </a:r>
+            <a:endParaRPr b="0" lang="ru-RU" sz="2600" strike="noStrike" u="none">
+              <a:solidFill>
+                <a:srgbClr val="000000"/>
+              </a:solidFill>
+              <a:effectLst/>
+              <a:uFillTx/>
+              <a:latin typeface="Arial"/>
+            </a:endParaRPr>
+          </a:p>
+          <a:p>
+            <a:pPr marL="432000" indent="-324000">
+              <a:lnSpc>
+                <a:spcPct val="100000"/>
+              </a:lnSpc>
+              <a:spcBef>
+                <a:spcPts val="1191"/>
+              </a:spcBef>
+              <a:spcAft>
+                <a:spcPts val="992"/>
+              </a:spcAft>
+              <a:buClr>
+                <a:srgbClr val="000000"/>
+              </a:buClr>
+              <a:buSzPct val="45000"/>
+              <a:buFont typeface="Wingdings" charset="2"/>
+              <a:buChar char=""/>
+            </a:pPr>
+            <a:r>
+              <a:rPr b="0" lang="ru-RU" sz="2600" strike="noStrike" u="none">
+                <a:solidFill>
+                  <a:srgbClr val="000000"/>
+                </a:solidFill>
+                <a:effectLst/>
+                <a:uFillTx/>
+                <a:latin typeface="Noto Sans"/>
+                <a:hlinkClick r:id="rId4"/>
+              </a:rPr>
+              <a:t>https://kulpole.ru/article/dmitrij-donskoj-kratkaya-biografiya</a:t>
+            </a:r>
+            <a:r>
+              <a:rPr b="0" lang="ru-RU" sz="2600" strike="noStrike" u="none">
+                <a:solidFill>
+                  <a:srgbClr val="000000"/>
+                </a:solidFill>
+                <a:effectLst/>
+                <a:uFillTx/>
+                <a:latin typeface="Noto Sans"/>
+              </a:rPr>
+              <a:t> </a:t>
+            </a:r>
+            <a:endParaRPr b="0" lang="ru-RU" sz="2600" strike="noStrike" u="none">
               <a:solidFill>
                 <a:srgbClr val="000000"/>
               </a:solidFill>

--- a/История/Дмитрий Донской.pptx
+++ b/История/Дмитрий Донской.pptx
@@ -155,7 +155,7 @@
                 <a:uFillTx/>
                 <a:latin typeface="Times New Roman"/>
               </a:rPr>
-              <a:t> </a:t>
+              <a:t>&lt;нижний колонтитул&gt;</a:t>
             </a:r>
             <a:endParaRPr b="0" lang="ru-RU" sz="1400" strike="noStrike" u="none">
               <a:solidFill>
@@ -224,7 +224,7 @@
                 <a:tab algn="l" pos="0"/>
               </a:tabLst>
             </a:pPr>
-            <a:fld id="{C90037CB-B0B2-46DF-B2B0-559E5CF3C9E1}" type="slidenum">
+            <a:fld id="{878B6F00-66B7-48AA-B429-61CD56BA2C09}" type="slidenum">
               <a:rPr b="0" lang="ru-RU" sz="1400" strike="noStrike" u="none">
                 <a:solidFill>
                   <a:srgbClr val="000000"/>
@@ -233,7 +233,7 @@
                 <a:uFillTx/>
                 <a:latin typeface="Times New Roman"/>
               </a:rPr>
-              <a:t>2</a:t>
+              <a:t>&lt;номер&gt;</a:t>
             </a:fld>
             <a:endParaRPr b="0" lang="ru-RU" sz="1400" strike="noStrike" u="none">
               <a:solidFill>
@@ -299,7 +299,7 @@
                 <a:uFillTx/>
                 <a:latin typeface="Times New Roman"/>
               </a:rPr>
-              <a:t> </a:t>
+              <a:t>&lt;дата/время&gt;</a:t>
             </a:r>
             <a:endParaRPr b="0" lang="ru-RU" sz="1400" strike="noStrike" u="none">
               <a:solidFill>
@@ -1027,7 +1027,7 @@
                 <a:tab algn="l" pos="0"/>
               </a:tabLst>
             </a:pPr>
-            <a:fld id="{8BE0B1B8-9B9D-4533-89CE-8E59D6626A19}" type="slidenum">
+            <a:fld id="{921430CB-E36B-47DD-9063-CD015D9CBD98}" type="slidenum">
               <a:rPr b="0" lang="ru-RU" sz="1400" strike="noStrike" u="none">
                 <a:solidFill>
                   <a:srgbClr val="000000"/>
